--- a/docs/ResumeIQ_Presentation.pptx
+++ b/docs/ResumeIQ_Presentation.pptx
@@ -17,6 +17,10 @@
     <p:sldId id="265" r:id="rId11"/>
     <p:sldId id="266" r:id="rId12"/>
     <p:sldId id="267" r:id="rId13"/>
+    <p:sldId id="269" r:id="rId20"/>
+    <p:sldId id="270" r:id="rId21"/>
+    <p:sldId id="271" r:id="rId22"/>
+    <p:sldId id="272" r:id="rId23"/>
     <p:sldId id="268" r:id="rId14"/>
   </p:sldIdLst>
   <p:notesMasterIdLst>
@@ -2469,6 +2473,10 @@
           </a:solidFill>
           <a:ln/>
         </p:spPr>
+        <p:txBody>
+          <a:bodyPr/>
+          <a:p/>
+        </p:txBody>
       </p:sp>
       <p:sp>
         <p:nvSpPr>
@@ -2489,6 +2497,10 @@
           </a:solidFill>
           <a:ln/>
         </p:spPr>
+        <p:txBody>
+          <a:bodyPr/>
+          <a:p/>
+        </p:txBody>
       </p:sp>
       <p:sp>
         <p:nvSpPr>
@@ -2640,7 +2652,7 @@
                 <a:ea typeface="Calibri" pitchFamily="34" charset="-122"/>
                 <a:cs typeface="Calibri" pitchFamily="34" charset="-120"/>
               </a:rPr>
-              <a:t>Capstone Project  |  [Your Name]  |  [Course / Institution]  |  [Date]</a:t>
+              <a:t>Capstone Project  |  Aditya Parthasarathy  |  SkillOrbit AI Capstone Project</a:t>
             </a:r>
             <a:endParaRPr lang="en-US" sz="1300" dirty="0"/>
           </a:p>
@@ -2784,6 +2796,10 @@
             </a:outerShdw>
           </a:effectLst>
         </p:spPr>
+        <p:txBody>
+          <a:bodyPr/>
+          <a:p/>
+        </p:txBody>
       </p:sp>
       <p:sp>
         <p:nvSpPr>
@@ -2891,6 +2907,10 @@
             </a:outerShdw>
           </a:effectLst>
         </p:spPr>
+        <p:txBody>
+          <a:bodyPr/>
+          <a:p/>
+        </p:txBody>
       </p:sp>
       <p:sp>
         <p:nvSpPr>
@@ -2998,6 +3018,10 @@
             </a:outerShdw>
           </a:effectLst>
         </p:spPr>
+        <p:txBody>
+          <a:bodyPr/>
+          <a:p/>
+        </p:txBody>
       </p:sp>
       <p:sp>
         <p:nvSpPr>
@@ -3121,6 +3145,10 @@
             </a:outerShdw>
           </a:effectLst>
         </p:spPr>
+        <p:txBody>
+          <a:bodyPr/>
+          <a:p/>
+        </p:txBody>
       </p:sp>
       <p:sp>
         <p:nvSpPr>
@@ -3538,7 +3566,7 @@
                 <a:ea typeface="Cambria" pitchFamily="34" charset="-122"/>
                 <a:cs typeface="Cambria" pitchFamily="34" charset="-120"/>
               </a:rPr>
-              <a:t>74 tests  --  plus bugs only manual testing caught</a:t>
+              <a:t>119 tests  --  plus bugs only manual testing caught</a:t>
             </a:r>
             <a:endParaRPr lang="en-US" sz="3200" dirty="0"/>
           </a:p>
@@ -3611,6 +3639,10 @@
             </a:outerShdw>
           </a:effectLst>
         </p:spPr>
+        <p:txBody>
+          <a:bodyPr/>
+          <a:p/>
+        </p:txBody>
       </p:sp>
       <p:sp>
         <p:nvSpPr>
@@ -3757,6 +3789,10 @@
             </a:outerShdw>
           </a:effectLst>
         </p:spPr>
+        <p:txBody>
+          <a:bodyPr/>
+          <a:p/>
+        </p:txBody>
       </p:sp>
       <p:sp>
         <p:nvSpPr>
@@ -3903,6 +3939,10 @@
             </a:outerShdw>
           </a:effectLst>
         </p:spPr>
+        <p:txBody>
+          <a:bodyPr/>
+          <a:p/>
+        </p:txBody>
       </p:sp>
       <p:sp>
         <p:nvSpPr>
@@ -4049,6 +4089,10 @@
             </a:outerShdw>
           </a:effectLst>
         </p:spPr>
+        <p:txBody>
+          <a:bodyPr/>
+          <a:p/>
+        </p:txBody>
       </p:sp>
       <p:sp>
         <p:nvSpPr>
@@ -4335,6 +4379,10 @@
           </a:solidFill>
           <a:ln/>
         </p:spPr>
+        <p:txBody>
+          <a:bodyPr/>
+          <a:p/>
+        </p:txBody>
       </p:sp>
       <p:sp>
         <p:nvSpPr>
@@ -4433,6 +4481,10 @@
           </a:solidFill>
           <a:ln/>
         </p:spPr>
+        <p:txBody>
+          <a:bodyPr/>
+          <a:p/>
+        </p:txBody>
       </p:sp>
       <p:sp>
         <p:nvSpPr>
@@ -4531,6 +4583,10 @@
           </a:solidFill>
           <a:ln/>
         </p:spPr>
+        <p:txBody>
+          <a:bodyPr/>
+          <a:p/>
+        </p:txBody>
       </p:sp>
       <p:sp>
         <p:nvSpPr>
@@ -4629,6 +4685,10 @@
           </a:solidFill>
           <a:ln/>
         </p:spPr>
+        <p:txBody>
+          <a:bodyPr/>
+          <a:p/>
+        </p:txBody>
       </p:sp>
       <p:sp>
         <p:nvSpPr>
@@ -4736,6 +4796,10 @@
             </a:outerShdw>
           </a:effectLst>
         </p:spPr>
+        <p:txBody>
+          <a:bodyPr/>
+          <a:p/>
+        </p:txBody>
       </p:sp>
       <p:sp>
         <p:nvSpPr>
@@ -4905,6 +4969,10 @@
           </a:solidFill>
           <a:ln/>
         </p:spPr>
+        <p:txBody>
+          <a:bodyPr/>
+          <a:p/>
+        </p:txBody>
       </p:sp>
       <p:sp>
         <p:nvSpPr>
@@ -4925,6 +4993,10 @@
           </a:solidFill>
           <a:ln/>
         </p:spPr>
+        <p:txBody>
+          <a:bodyPr/>
+          <a:p/>
+        </p:txBody>
       </p:sp>
       <p:sp>
         <p:nvSpPr>
@@ -5196,6 +5268,2591 @@
               <a:t>Questions?</a:t>
             </a:r>
             <a:endParaRPr lang="en-US" sz="1300" dirty="0"/>
+          </a:p>
+        </p:txBody>
+      </p:sp>
+    </p:spTree>
+  </p:cSld>
+  <p:clrMapOvr>
+    <a:masterClrMapping/>
+  </p:clrMapOvr>
+</p:sld>
+</file>
+
+<file path=ppt/slides/slide14.xml><?xml version="1.0" encoding="utf-8"?>
+<p:sld xmlns:a="http://schemas.openxmlformats.org/drawingml/2006/main" xmlns:p="http://schemas.openxmlformats.org/presentationml/2006/main" xmlns:r="http://schemas.openxmlformats.org/officeDocument/2006/relationships">
+  <p:cSld>
+    <p:bg>
+      <p:bgPr>
+        <a:solidFill>
+          <a:srgbClr val="FFFFFF"/>
+        </a:solidFill>
+        <a:effectLst/>
+      </p:bgPr>
+    </p:bg>
+    <p:spTree>
+      <p:nvGrpSpPr>
+        <p:cNvPr id="1" name=""/>
+        <p:cNvGrpSpPr/>
+        <p:nvPr/>
+      </p:nvGrpSpPr>
+      <p:grpSpPr/>
+      <p:sp>
+        <p:nvSpPr>
+          <p:cNvPr id="2" name="TextBox 1"/>
+          <p:cNvSpPr txBox="1"/>
+          <p:nvPr/>
+        </p:nvSpPr>
+        <p:spPr>
+          <a:xfrm>
+            <a:off x="548640" y="256032"/>
+            <a:ext cx="9144000" cy="320040"/>
+          </a:xfrm>
+          <a:prstGeom prst="rect">
+            <a:avLst/>
+          </a:prstGeom>
+          <a:noFill/>
+        </p:spPr>
+        <p:txBody>
+          <a:bodyPr wrap="square" lIns="0" rIns="0" tIns="0" bIns="0">
+            <a:spAutoFit/>
+          </a:bodyPr>
+          <a:lstStyle/>
+          <a:p>
+            <a:r>
+              <a:rPr sz="1200" b="1">
+                <a:solidFill>
+                  <a:srgbClr val="F5A623"/>
+                </a:solidFill>
+                <a:latin typeface="Calibri"/>
+              </a:rPr>
+              <a:t>DIFFERENTIATOR C</a:t>
+            </a:r>
+          </a:p>
+        </p:txBody>
+      </p:sp>
+      <p:sp>
+        <p:nvSpPr>
+          <p:cNvPr id="3" name="TextBox 2"/>
+          <p:cNvSpPr txBox="1"/>
+          <p:nvPr/>
+        </p:nvSpPr>
+        <p:spPr>
+          <a:xfrm>
+            <a:off x="548640" y="457200"/>
+            <a:ext cx="11064240" cy="822960"/>
+          </a:xfrm>
+          <a:prstGeom prst="rect">
+            <a:avLst/>
+          </a:prstGeom>
+          <a:noFill/>
+        </p:spPr>
+        <p:txBody>
+          <a:bodyPr wrap="square" lIns="0" rIns="0" tIns="0" bIns="0">
+            <a:spAutoFit/>
+          </a:bodyPr>
+          <a:lstStyle/>
+          <a:p>
+            <a:r>
+              <a:rPr sz="3200" b="1">
+                <a:solidFill>
+                  <a:srgbClr val="1E2761"/>
+                </a:solidFill>
+                <a:latin typeface="Cambria"/>
+              </a:rPr>
+              <a:t>Same resume, every role compared</a:t>
+            </a:r>
+          </a:p>
+        </p:txBody>
+      </p:sp>
+      <p:sp>
+        <p:nvSpPr>
+          <p:cNvPr id="4" name="TextBox 3"/>
+          <p:cNvSpPr txBox="1"/>
+          <p:nvPr/>
+        </p:nvSpPr>
+        <p:spPr>
+          <a:xfrm>
+            <a:off x="548640" y="1325880"/>
+            <a:ext cx="10058400" cy="365760"/>
+          </a:xfrm>
+          <a:prstGeom prst="rect">
+            <a:avLst/>
+          </a:prstGeom>
+          <a:noFill/>
+        </p:spPr>
+        <p:txBody>
+          <a:bodyPr wrap="square" lIns="0" rIns="0" tIns="0" bIns="0">
+            <a:spAutoFit/>
+          </a:bodyPr>
+          <a:lstStyle/>
+          <a:p>
+            <a:r>
+              <a:rPr sz="1250" b="0">
+                <a:solidFill>
+                  <a:srgbClr val="5B6B8C"/>
+                </a:solidFill>
+                <a:latin typeface="Calibri"/>
+              </a:rPr>
+              <a:t>The ATS matcher is regex/fuzzy comparison, not a spaCy call -- cheap enough to run against all 8 role banks on every view.</a:t>
+            </a:r>
+          </a:p>
+        </p:txBody>
+      </p:sp>
+      <p:sp>
+        <p:nvSpPr>
+          <p:cNvPr id="5" name="TextBox 4"/>
+          <p:cNvSpPr txBox="1"/>
+          <p:nvPr/>
+        </p:nvSpPr>
+        <p:spPr>
+          <a:xfrm>
+            <a:off x="548640" y="1993392"/>
+            <a:ext cx="2331720" cy="365760"/>
+          </a:xfrm>
+          <a:prstGeom prst="rect">
+            <a:avLst/>
+          </a:prstGeom>
+          <a:noFill/>
+        </p:spPr>
+        <p:txBody>
+          <a:bodyPr wrap="square" lIns="0" rIns="0" tIns="0" bIns="0">
+            <a:spAutoFit/>
+          </a:bodyPr>
+          <a:lstStyle/>
+          <a:p>
+            <a:r>
+              <a:rPr sz="1300" b="1">
+                <a:solidFill>
+                  <a:srgbClr val="1E2761"/>
+                </a:solidFill>
+                <a:latin typeface="Calibri"/>
+              </a:rPr>
+              <a:t>Data Analyst</a:t>
+            </a:r>
+          </a:p>
+        </p:txBody>
+      </p:sp>
+      <p:sp>
+        <p:nvSpPr>
+          <p:cNvPr id="6" name="Rounded Rectangle 5"/>
+          <p:cNvSpPr/>
+          <p:nvPr/>
+        </p:nvSpPr>
+        <p:spPr>
+          <a:xfrm>
+            <a:off x="3154680" y="1965960"/>
+            <a:ext cx="7223760" cy="384048"/>
+          </a:xfrm>
+          <a:prstGeom prst="roundRect">
+            <a:avLst>
+              <a:gd name="adj" fmla="val 25000"/>
+            </a:avLst>
+          </a:prstGeom>
+          <a:solidFill>
+            <a:srgbClr val="F5A623"/>
+          </a:solidFill>
+          <a:ln>
+            <a:noFill/>
+          </a:ln>
+          <a:effectLst/>
+        </p:spPr>
+        <p:style>
+          <a:lnRef idx="1">
+            <a:schemeClr val="accent1"/>
+          </a:lnRef>
+          <a:fillRef idx="3">
+            <a:schemeClr val="accent1"/>
+          </a:fillRef>
+          <a:effectRef idx="2">
+            <a:schemeClr val="accent1"/>
+          </a:effectRef>
+          <a:fontRef idx="minor">
+            <a:schemeClr val="lt1"/>
+          </a:fontRef>
+        </p:style>
+        <p:txBody>
+          <a:bodyPr rtlCol="0" anchor="ctr"/>
+          <a:lstStyle/>
+          <a:p>
+            <a:pPr algn="ctr"/>
+          </a:p>
+        </p:txBody>
+      </p:sp>
+      <p:sp>
+        <p:nvSpPr>
+          <p:cNvPr id="7" name="TextBox 6"/>
+          <p:cNvSpPr txBox="1"/>
+          <p:nvPr/>
+        </p:nvSpPr>
+        <p:spPr>
+          <a:xfrm>
+            <a:off x="10515600" y="1993392"/>
+            <a:ext cx="1097280" cy="365760"/>
+          </a:xfrm>
+          <a:prstGeom prst="rect">
+            <a:avLst/>
+          </a:prstGeom>
+          <a:noFill/>
+        </p:spPr>
+        <p:txBody>
+          <a:bodyPr wrap="square" lIns="0" rIns="0" tIns="0" bIns="0">
+            <a:spAutoFit/>
+          </a:bodyPr>
+          <a:lstStyle/>
+          <a:p>
+            <a:r>
+              <a:rPr sz="1200" b="1">
+                <a:solidFill>
+                  <a:srgbClr val="5B6B8C"/>
+                </a:solidFill>
+                <a:latin typeface="Calibri"/>
+              </a:rPr>
+              <a:t>35/100</a:t>
+            </a:r>
+          </a:p>
+        </p:txBody>
+      </p:sp>
+      <p:sp>
+        <p:nvSpPr>
+          <p:cNvPr id="8" name="TextBox 7"/>
+          <p:cNvSpPr txBox="1"/>
+          <p:nvPr/>
+        </p:nvSpPr>
+        <p:spPr>
+          <a:xfrm>
+            <a:off x="11567160" y="1993392"/>
+            <a:ext cx="1463040" cy="365760"/>
+          </a:xfrm>
+          <a:prstGeom prst="rect">
+            <a:avLst/>
+          </a:prstGeom>
+          <a:noFill/>
+        </p:spPr>
+        <p:txBody>
+          <a:bodyPr wrap="square" lIns="0" rIns="0" tIns="0" bIns="0">
+            <a:spAutoFit/>
+          </a:bodyPr>
+          <a:lstStyle/>
+          <a:p>
+            <a:r>
+              <a:rPr sz="1100" b="1">
+                <a:solidFill>
+                  <a:srgbClr val="F5A623"/>
+                </a:solidFill>
+                <a:latin typeface="Calibri"/>
+              </a:rPr>
+              <a:t>best fit</a:t>
+            </a:r>
+          </a:p>
+        </p:txBody>
+      </p:sp>
+      <p:sp>
+        <p:nvSpPr>
+          <p:cNvPr id="9" name="TextBox 8"/>
+          <p:cNvSpPr txBox="1"/>
+          <p:nvPr/>
+        </p:nvSpPr>
+        <p:spPr>
+          <a:xfrm>
+            <a:off x="548640" y="2560320"/>
+            <a:ext cx="2331720" cy="365760"/>
+          </a:xfrm>
+          <a:prstGeom prst="rect">
+            <a:avLst/>
+          </a:prstGeom>
+          <a:noFill/>
+        </p:spPr>
+        <p:txBody>
+          <a:bodyPr wrap="square" lIns="0" rIns="0" tIns="0" bIns="0">
+            <a:spAutoFit/>
+          </a:bodyPr>
+          <a:lstStyle/>
+          <a:p>
+            <a:r>
+              <a:rPr sz="1300" b="0">
+                <a:solidFill>
+                  <a:srgbClr val="1E2761"/>
+                </a:solidFill>
+                <a:latin typeface="Calibri"/>
+              </a:rPr>
+              <a:t>Web Developer</a:t>
+            </a:r>
+          </a:p>
+        </p:txBody>
+      </p:sp>
+      <p:sp>
+        <p:nvSpPr>
+          <p:cNvPr id="10" name="Rounded Rectangle 9"/>
+          <p:cNvSpPr/>
+          <p:nvPr/>
+        </p:nvSpPr>
+        <p:spPr>
+          <a:xfrm>
+            <a:off x="3154680" y="2532888"/>
+            <a:ext cx="3095897" cy="384048"/>
+          </a:xfrm>
+          <a:prstGeom prst="roundRect">
+            <a:avLst>
+              <a:gd name="adj" fmla="val 25000"/>
+            </a:avLst>
+          </a:prstGeom>
+          <a:solidFill>
+            <a:srgbClr val="5B6B8C"/>
+          </a:solidFill>
+          <a:ln>
+            <a:noFill/>
+          </a:ln>
+          <a:effectLst/>
+        </p:spPr>
+        <p:style>
+          <a:lnRef idx="1">
+            <a:schemeClr val="accent1"/>
+          </a:lnRef>
+          <a:fillRef idx="3">
+            <a:schemeClr val="accent1"/>
+          </a:fillRef>
+          <a:effectRef idx="2">
+            <a:schemeClr val="accent1"/>
+          </a:effectRef>
+          <a:fontRef idx="minor">
+            <a:schemeClr val="lt1"/>
+          </a:fontRef>
+        </p:style>
+        <p:txBody>
+          <a:bodyPr rtlCol="0" anchor="ctr"/>
+          <a:lstStyle/>
+          <a:p>
+            <a:pPr algn="ctr"/>
+          </a:p>
+        </p:txBody>
+      </p:sp>
+      <p:sp>
+        <p:nvSpPr>
+          <p:cNvPr id="11" name="TextBox 10"/>
+          <p:cNvSpPr txBox="1"/>
+          <p:nvPr/>
+        </p:nvSpPr>
+        <p:spPr>
+          <a:xfrm>
+            <a:off x="6387737" y="2560320"/>
+            <a:ext cx="1097280" cy="365760"/>
+          </a:xfrm>
+          <a:prstGeom prst="rect">
+            <a:avLst/>
+          </a:prstGeom>
+          <a:noFill/>
+        </p:spPr>
+        <p:txBody>
+          <a:bodyPr wrap="square" lIns="0" rIns="0" tIns="0" bIns="0">
+            <a:spAutoFit/>
+          </a:bodyPr>
+          <a:lstStyle/>
+          <a:p>
+            <a:r>
+              <a:rPr sz="1200" b="1">
+                <a:solidFill>
+                  <a:srgbClr val="5B6B8C"/>
+                </a:solidFill>
+                <a:latin typeface="Calibri"/>
+              </a:rPr>
+              <a:t>15/100</a:t>
+            </a:r>
+          </a:p>
+        </p:txBody>
+      </p:sp>
+      <p:sp>
+        <p:nvSpPr>
+          <p:cNvPr id="12" name="TextBox 11"/>
+          <p:cNvSpPr txBox="1"/>
+          <p:nvPr/>
+        </p:nvSpPr>
+        <p:spPr>
+          <a:xfrm>
+            <a:off x="548640" y="3127248"/>
+            <a:ext cx="2331720" cy="365760"/>
+          </a:xfrm>
+          <a:prstGeom prst="rect">
+            <a:avLst/>
+          </a:prstGeom>
+          <a:noFill/>
+        </p:spPr>
+        <p:txBody>
+          <a:bodyPr wrap="square" lIns="0" rIns="0" tIns="0" bIns="0">
+            <a:spAutoFit/>
+          </a:bodyPr>
+          <a:lstStyle/>
+          <a:p>
+            <a:r>
+              <a:rPr sz="1300" b="1">
+                <a:solidFill>
+                  <a:srgbClr val="1E2761"/>
+                </a:solidFill>
+                <a:latin typeface="Calibri"/>
+              </a:rPr>
+              <a:t>AI Engineer</a:t>
+            </a:r>
+          </a:p>
+        </p:txBody>
+      </p:sp>
+      <p:sp>
+        <p:nvSpPr>
+          <p:cNvPr id="13" name="Rounded Rectangle 12"/>
+          <p:cNvSpPr/>
+          <p:nvPr/>
+        </p:nvSpPr>
+        <p:spPr>
+          <a:xfrm>
+            <a:off x="3154680" y="3099815"/>
+            <a:ext cx="2889504" cy="384048"/>
+          </a:xfrm>
+          <a:prstGeom prst="roundRect">
+            <a:avLst>
+              <a:gd name="adj" fmla="val 25000"/>
+            </a:avLst>
+          </a:prstGeom>
+          <a:solidFill>
+            <a:srgbClr val="1E2761"/>
+          </a:solidFill>
+          <a:ln>
+            <a:noFill/>
+          </a:ln>
+          <a:effectLst/>
+        </p:spPr>
+        <p:style>
+          <a:lnRef idx="1">
+            <a:schemeClr val="accent1"/>
+          </a:lnRef>
+          <a:fillRef idx="3">
+            <a:schemeClr val="accent1"/>
+          </a:fillRef>
+          <a:effectRef idx="2">
+            <a:schemeClr val="accent1"/>
+          </a:effectRef>
+          <a:fontRef idx="minor">
+            <a:schemeClr val="lt1"/>
+          </a:fontRef>
+        </p:style>
+        <p:txBody>
+          <a:bodyPr rtlCol="0" anchor="ctr"/>
+          <a:lstStyle/>
+          <a:p>
+            <a:pPr algn="ctr"/>
+          </a:p>
+        </p:txBody>
+      </p:sp>
+      <p:sp>
+        <p:nvSpPr>
+          <p:cNvPr id="14" name="TextBox 13"/>
+          <p:cNvSpPr txBox="1"/>
+          <p:nvPr/>
+        </p:nvSpPr>
+        <p:spPr>
+          <a:xfrm>
+            <a:off x="6181344" y="3127248"/>
+            <a:ext cx="1097280" cy="365760"/>
+          </a:xfrm>
+          <a:prstGeom prst="rect">
+            <a:avLst/>
+          </a:prstGeom>
+          <a:noFill/>
+        </p:spPr>
+        <p:txBody>
+          <a:bodyPr wrap="square" lIns="0" rIns="0" tIns="0" bIns="0">
+            <a:spAutoFit/>
+          </a:bodyPr>
+          <a:lstStyle/>
+          <a:p>
+            <a:r>
+              <a:rPr sz="1200" b="1">
+                <a:solidFill>
+                  <a:srgbClr val="5B6B8C"/>
+                </a:solidFill>
+                <a:latin typeface="Calibri"/>
+              </a:rPr>
+              <a:t>14/100</a:t>
+            </a:r>
+          </a:p>
+        </p:txBody>
+      </p:sp>
+      <p:sp>
+        <p:nvSpPr>
+          <p:cNvPr id="15" name="TextBox 14"/>
+          <p:cNvSpPr txBox="1"/>
+          <p:nvPr/>
+        </p:nvSpPr>
+        <p:spPr>
+          <a:xfrm>
+            <a:off x="7232904" y="3127248"/>
+            <a:ext cx="1463040" cy="365760"/>
+          </a:xfrm>
+          <a:prstGeom prst="rect">
+            <a:avLst/>
+          </a:prstGeom>
+          <a:noFill/>
+        </p:spPr>
+        <p:txBody>
+          <a:bodyPr wrap="square" lIns="0" rIns="0" tIns="0" bIns="0">
+            <a:spAutoFit/>
+          </a:bodyPr>
+          <a:lstStyle/>
+          <a:p>
+            <a:r>
+              <a:rPr sz="1100" b="1">
+                <a:solidFill>
+                  <a:srgbClr val="1E2761"/>
+                </a:solidFill>
+                <a:latin typeface="Calibri"/>
+              </a:rPr>
+              <a:t>target role</a:t>
+            </a:r>
+          </a:p>
+        </p:txBody>
+      </p:sp>
+      <p:sp>
+        <p:nvSpPr>
+          <p:cNvPr id="16" name="TextBox 15"/>
+          <p:cNvSpPr txBox="1"/>
+          <p:nvPr/>
+        </p:nvSpPr>
+        <p:spPr>
+          <a:xfrm>
+            <a:off x="548640" y="3694176"/>
+            <a:ext cx="2331720" cy="365760"/>
+          </a:xfrm>
+          <a:prstGeom prst="rect">
+            <a:avLst/>
+          </a:prstGeom>
+          <a:noFill/>
+        </p:spPr>
+        <p:txBody>
+          <a:bodyPr wrap="square" lIns="0" rIns="0" tIns="0" bIns="0">
+            <a:spAutoFit/>
+          </a:bodyPr>
+          <a:lstStyle/>
+          <a:p>
+            <a:r>
+              <a:rPr sz="1300" b="0">
+                <a:solidFill>
+                  <a:srgbClr val="1E2761"/>
+                </a:solidFill>
+                <a:latin typeface="Calibri"/>
+              </a:rPr>
+              <a:t>Backend Developer</a:t>
+            </a:r>
+          </a:p>
+        </p:txBody>
+      </p:sp>
+      <p:sp>
+        <p:nvSpPr>
+          <p:cNvPr id="17" name="Rounded Rectangle 16"/>
+          <p:cNvSpPr/>
+          <p:nvPr/>
+        </p:nvSpPr>
+        <p:spPr>
+          <a:xfrm>
+            <a:off x="3154680" y="3666744"/>
+            <a:ext cx="2889504" cy="384048"/>
+          </a:xfrm>
+          <a:prstGeom prst="roundRect">
+            <a:avLst>
+              <a:gd name="adj" fmla="val 25000"/>
+            </a:avLst>
+          </a:prstGeom>
+          <a:solidFill>
+            <a:srgbClr val="5B6B8C"/>
+          </a:solidFill>
+          <a:ln>
+            <a:noFill/>
+          </a:ln>
+          <a:effectLst/>
+        </p:spPr>
+        <p:style>
+          <a:lnRef idx="1">
+            <a:schemeClr val="accent1"/>
+          </a:lnRef>
+          <a:fillRef idx="3">
+            <a:schemeClr val="accent1"/>
+          </a:fillRef>
+          <a:effectRef idx="2">
+            <a:schemeClr val="accent1"/>
+          </a:effectRef>
+          <a:fontRef idx="minor">
+            <a:schemeClr val="lt1"/>
+          </a:fontRef>
+        </p:style>
+        <p:txBody>
+          <a:bodyPr rtlCol="0" anchor="ctr"/>
+          <a:lstStyle/>
+          <a:p>
+            <a:pPr algn="ctr"/>
+          </a:p>
+        </p:txBody>
+      </p:sp>
+      <p:sp>
+        <p:nvSpPr>
+          <p:cNvPr id="18" name="TextBox 17"/>
+          <p:cNvSpPr txBox="1"/>
+          <p:nvPr/>
+        </p:nvSpPr>
+        <p:spPr>
+          <a:xfrm>
+            <a:off x="6181344" y="3694176"/>
+            <a:ext cx="1097280" cy="365760"/>
+          </a:xfrm>
+          <a:prstGeom prst="rect">
+            <a:avLst/>
+          </a:prstGeom>
+          <a:noFill/>
+        </p:spPr>
+        <p:txBody>
+          <a:bodyPr wrap="square" lIns="0" rIns="0" tIns="0" bIns="0">
+            <a:spAutoFit/>
+          </a:bodyPr>
+          <a:lstStyle/>
+          <a:p>
+            <a:r>
+              <a:rPr sz="1200" b="1">
+                <a:solidFill>
+                  <a:srgbClr val="5B6B8C"/>
+                </a:solidFill>
+                <a:latin typeface="Calibri"/>
+              </a:rPr>
+              <a:t>14/100</a:t>
+            </a:r>
+          </a:p>
+        </p:txBody>
+      </p:sp>
+      <p:sp>
+        <p:nvSpPr>
+          <p:cNvPr id="19" name="TextBox 18"/>
+          <p:cNvSpPr txBox="1"/>
+          <p:nvPr/>
+        </p:nvSpPr>
+        <p:spPr>
+          <a:xfrm>
+            <a:off x="548640" y="4261104"/>
+            <a:ext cx="2331720" cy="365760"/>
+          </a:xfrm>
+          <a:prstGeom prst="rect">
+            <a:avLst/>
+          </a:prstGeom>
+          <a:noFill/>
+        </p:spPr>
+        <p:txBody>
+          <a:bodyPr wrap="square" lIns="0" rIns="0" tIns="0" bIns="0">
+            <a:spAutoFit/>
+          </a:bodyPr>
+          <a:lstStyle/>
+          <a:p>
+            <a:r>
+              <a:rPr sz="1300" b="0">
+                <a:solidFill>
+                  <a:srgbClr val="1E2761"/>
+                </a:solidFill>
+                <a:latin typeface="Calibri"/>
+              </a:rPr>
+              <a:t>Cloud Engineer</a:t>
+            </a:r>
+          </a:p>
+        </p:txBody>
+      </p:sp>
+      <p:sp>
+        <p:nvSpPr>
+          <p:cNvPr id="20" name="Rounded Rectangle 19"/>
+          <p:cNvSpPr/>
+          <p:nvPr/>
+        </p:nvSpPr>
+        <p:spPr>
+          <a:xfrm>
+            <a:off x="3154680" y="4233672"/>
+            <a:ext cx="164592" cy="384048"/>
+          </a:xfrm>
+          <a:prstGeom prst="roundRect">
+            <a:avLst>
+              <a:gd name="adj" fmla="val 25000"/>
+            </a:avLst>
+          </a:prstGeom>
+          <a:solidFill>
+            <a:srgbClr val="CADCFC"/>
+          </a:solidFill>
+          <a:ln>
+            <a:noFill/>
+          </a:ln>
+          <a:effectLst/>
+        </p:spPr>
+        <p:style>
+          <a:lnRef idx="1">
+            <a:schemeClr val="accent1"/>
+          </a:lnRef>
+          <a:fillRef idx="3">
+            <a:schemeClr val="accent1"/>
+          </a:fillRef>
+          <a:effectRef idx="2">
+            <a:schemeClr val="accent1"/>
+          </a:effectRef>
+          <a:fontRef idx="minor">
+            <a:schemeClr val="lt1"/>
+          </a:fontRef>
+        </p:style>
+        <p:txBody>
+          <a:bodyPr rtlCol="0" anchor="ctr"/>
+          <a:lstStyle/>
+          <a:p>
+            <a:pPr algn="ctr"/>
+          </a:p>
+        </p:txBody>
+      </p:sp>
+      <p:sp>
+        <p:nvSpPr>
+          <p:cNvPr id="21" name="TextBox 20"/>
+          <p:cNvSpPr txBox="1"/>
+          <p:nvPr/>
+        </p:nvSpPr>
+        <p:spPr>
+          <a:xfrm>
+            <a:off x="3456432" y="4261104"/>
+            <a:ext cx="1097280" cy="365760"/>
+          </a:xfrm>
+          <a:prstGeom prst="rect">
+            <a:avLst/>
+          </a:prstGeom>
+          <a:noFill/>
+        </p:spPr>
+        <p:txBody>
+          <a:bodyPr wrap="square" lIns="0" rIns="0" tIns="0" bIns="0">
+            <a:spAutoFit/>
+          </a:bodyPr>
+          <a:lstStyle/>
+          <a:p>
+            <a:r>
+              <a:rPr sz="1200" b="1">
+                <a:solidFill>
+                  <a:srgbClr val="5B6B8C"/>
+                </a:solidFill>
+                <a:latin typeface="Calibri"/>
+              </a:rPr>
+              <a:t>0/100</a:t>
+            </a:r>
+          </a:p>
+        </p:txBody>
+      </p:sp>
+      <p:sp>
+        <p:nvSpPr>
+          <p:cNvPr id="22" name="TextBox 21"/>
+          <p:cNvSpPr txBox="1"/>
+          <p:nvPr/>
+        </p:nvSpPr>
+        <p:spPr>
+          <a:xfrm>
+            <a:off x="548640" y="4828032"/>
+            <a:ext cx="2331720" cy="365760"/>
+          </a:xfrm>
+          <a:prstGeom prst="rect">
+            <a:avLst/>
+          </a:prstGeom>
+          <a:noFill/>
+        </p:spPr>
+        <p:txBody>
+          <a:bodyPr wrap="square" lIns="0" rIns="0" tIns="0" bIns="0">
+            <a:spAutoFit/>
+          </a:bodyPr>
+          <a:lstStyle/>
+          <a:p>
+            <a:r>
+              <a:rPr sz="1300" b="0">
+                <a:solidFill>
+                  <a:srgbClr val="1E2761"/>
+                </a:solidFill>
+                <a:latin typeface="Calibri"/>
+              </a:rPr>
+              <a:t>Mobile App Developer</a:t>
+            </a:r>
+          </a:p>
+        </p:txBody>
+      </p:sp>
+      <p:sp>
+        <p:nvSpPr>
+          <p:cNvPr id="23" name="Rounded Rectangle 22"/>
+          <p:cNvSpPr/>
+          <p:nvPr/>
+        </p:nvSpPr>
+        <p:spPr>
+          <a:xfrm>
+            <a:off x="3154680" y="4800600"/>
+            <a:ext cx="164592" cy="384048"/>
+          </a:xfrm>
+          <a:prstGeom prst="roundRect">
+            <a:avLst>
+              <a:gd name="adj" fmla="val 25000"/>
+            </a:avLst>
+          </a:prstGeom>
+          <a:solidFill>
+            <a:srgbClr val="CADCFC"/>
+          </a:solidFill>
+          <a:ln>
+            <a:noFill/>
+          </a:ln>
+          <a:effectLst/>
+        </p:spPr>
+        <p:style>
+          <a:lnRef idx="1">
+            <a:schemeClr val="accent1"/>
+          </a:lnRef>
+          <a:fillRef idx="3">
+            <a:schemeClr val="accent1"/>
+          </a:fillRef>
+          <a:effectRef idx="2">
+            <a:schemeClr val="accent1"/>
+          </a:effectRef>
+          <a:fontRef idx="minor">
+            <a:schemeClr val="lt1"/>
+          </a:fontRef>
+        </p:style>
+        <p:txBody>
+          <a:bodyPr rtlCol="0" anchor="ctr"/>
+          <a:lstStyle/>
+          <a:p>
+            <a:pPr algn="ctr"/>
+          </a:p>
+        </p:txBody>
+      </p:sp>
+      <p:sp>
+        <p:nvSpPr>
+          <p:cNvPr id="24" name="TextBox 23"/>
+          <p:cNvSpPr txBox="1"/>
+          <p:nvPr/>
+        </p:nvSpPr>
+        <p:spPr>
+          <a:xfrm>
+            <a:off x="3456432" y="4828032"/>
+            <a:ext cx="1097280" cy="365760"/>
+          </a:xfrm>
+          <a:prstGeom prst="rect">
+            <a:avLst/>
+          </a:prstGeom>
+          <a:noFill/>
+        </p:spPr>
+        <p:txBody>
+          <a:bodyPr wrap="square" lIns="0" rIns="0" tIns="0" bIns="0">
+            <a:spAutoFit/>
+          </a:bodyPr>
+          <a:lstStyle/>
+          <a:p>
+            <a:r>
+              <a:rPr sz="1200" b="1">
+                <a:solidFill>
+                  <a:srgbClr val="5B6B8C"/>
+                </a:solidFill>
+                <a:latin typeface="Calibri"/>
+              </a:rPr>
+              <a:t>0/100</a:t>
+            </a:r>
+          </a:p>
+        </p:txBody>
+      </p:sp>
+      <p:sp>
+        <p:nvSpPr>
+          <p:cNvPr id="25" name="Rounded Rectangle 24"/>
+          <p:cNvSpPr/>
+          <p:nvPr/>
+        </p:nvSpPr>
+        <p:spPr>
+          <a:xfrm>
+            <a:off x="548640" y="5440680"/>
+            <a:ext cx="11064240" cy="1005840"/>
+          </a:xfrm>
+          <a:prstGeom prst="roundRect">
+            <a:avLst>
+              <a:gd name="adj" fmla="val 8000"/>
+            </a:avLst>
+          </a:prstGeom>
+          <a:solidFill>
+            <a:srgbClr val="1E2761"/>
+          </a:solidFill>
+          <a:ln>
+            <a:noFill/>
+          </a:ln>
+          <a:effectLst/>
+        </p:spPr>
+        <p:style>
+          <a:lnRef idx="1">
+            <a:schemeClr val="accent1"/>
+          </a:lnRef>
+          <a:fillRef idx="3">
+            <a:schemeClr val="accent1"/>
+          </a:fillRef>
+          <a:effectRef idx="2">
+            <a:schemeClr val="accent1"/>
+          </a:effectRef>
+          <a:fontRef idx="minor">
+            <a:schemeClr val="lt1"/>
+          </a:fontRef>
+        </p:style>
+        <p:txBody>
+          <a:bodyPr rtlCol="0" anchor="ctr"/>
+          <a:lstStyle/>
+          <a:p>
+            <a:pPr algn="ctr"/>
+          </a:p>
+        </p:txBody>
+      </p:sp>
+      <p:sp>
+        <p:nvSpPr>
+          <p:cNvPr id="26" name="TextBox 25"/>
+          <p:cNvSpPr txBox="1"/>
+          <p:nvPr/>
+        </p:nvSpPr>
+        <p:spPr>
+          <a:xfrm>
+            <a:off x="868680" y="5577840"/>
+            <a:ext cx="7589520" cy="731520"/>
+          </a:xfrm>
+          <a:prstGeom prst="rect">
+            <a:avLst/>
+          </a:prstGeom>
+          <a:noFill/>
+        </p:spPr>
+        <p:txBody>
+          <a:bodyPr wrap="square" lIns="0" rIns="0" tIns="0" bIns="0">
+            <a:spAutoFit/>
+          </a:bodyPr>
+          <a:lstStyle/>
+          <a:p>
+            <a:r>
+              <a:rPr sz="1300" b="0">
+                <a:solidFill>
+                  <a:srgbClr val="FFFFFF"/>
+                </a:solidFill>
+                <a:latin typeface="Calibri"/>
+              </a:rPr>
+              <a:t>This resume actually matches </a:t>
+            </a:r>
+            <a:r>
+              <a:rPr sz="1300" b="1">
+                <a:solidFill>
+                  <a:srgbClr val="F5A623"/>
+                </a:solidFill>
+                <a:latin typeface="Calibri"/>
+              </a:rPr>
+              <a:t>Data Analyst</a:t>
+            </a:r>
+            <a:r>
+              <a:rPr sz="1300" b="0">
+                <a:solidFill>
+                  <a:srgbClr val="FFFFFF"/>
+                </a:solidFill>
+                <a:latin typeface="Calibri"/>
+              </a:rPr>
+              <a:t> keywords better (35/100) than AI Engineer (14/100)</a:t>
+            </a:r>
+            <a:r>
+              <a:rPr sz="1300" b="0">
+                <a:solidFill>
+                  <a:srgbClr val="FFFFFF"/>
+                </a:solidFill>
+                <a:latin typeface="Calibri"/>
+              </a:rPr>
+              <a:t> -- an honest cross-role check a single-role ATS score can't give you.</a:t>
+            </a:r>
+          </a:p>
+        </p:txBody>
+      </p:sp>
+      <p:sp>
+        <p:nvSpPr>
+          <p:cNvPr id="27" name="TextBox 26"/>
+          <p:cNvSpPr txBox="1"/>
+          <p:nvPr/>
+        </p:nvSpPr>
+        <p:spPr>
+          <a:xfrm>
+            <a:off x="11475720" y="6446520"/>
+            <a:ext cx="548640" cy="320040"/>
+          </a:xfrm>
+          <a:prstGeom prst="rect">
+            <a:avLst/>
+          </a:prstGeom>
+          <a:noFill/>
+        </p:spPr>
+        <p:txBody>
+          <a:bodyPr wrap="square" lIns="0" rIns="0" tIns="0" bIns="0">
+            <a:spAutoFit/>
+          </a:bodyPr>
+          <a:lstStyle/>
+          <a:p>
+            <a:pPr algn="r"/>
+            <a:r>
+              <a:rPr sz="1000" b="0">
+                <a:solidFill>
+                  <a:srgbClr val="5B6B8C"/>
+                </a:solidFill>
+                <a:latin typeface="Calibri"/>
+              </a:rPr>
+              <a:t>13</a:t>
+            </a:r>
+          </a:p>
+        </p:txBody>
+      </p:sp>
+    </p:spTree>
+  </p:cSld>
+  <p:clrMapOvr>
+    <a:masterClrMapping/>
+  </p:clrMapOvr>
+</p:sld>
+</file>
+
+<file path=ppt/slides/slide15.xml><?xml version="1.0" encoding="utf-8"?>
+<p:sld xmlns:a="http://schemas.openxmlformats.org/drawingml/2006/main" xmlns:p="http://schemas.openxmlformats.org/presentationml/2006/main" xmlns:r="http://schemas.openxmlformats.org/officeDocument/2006/relationships">
+  <p:cSld>
+    <p:bg>
+      <p:bgPr>
+        <a:solidFill>
+          <a:srgbClr val="FFFFFF"/>
+        </a:solidFill>
+        <a:effectLst/>
+      </p:bgPr>
+    </p:bg>
+    <p:spTree>
+      <p:nvGrpSpPr>
+        <p:cNvPr id="1" name=""/>
+        <p:cNvGrpSpPr/>
+        <p:nvPr/>
+      </p:nvGrpSpPr>
+      <p:grpSpPr/>
+      <p:sp>
+        <p:nvSpPr>
+          <p:cNvPr id="2" name="TextBox 1"/>
+          <p:cNvSpPr txBox="1"/>
+          <p:nvPr/>
+        </p:nvSpPr>
+        <p:spPr>
+          <a:xfrm>
+            <a:off x="548640" y="256032"/>
+            <a:ext cx="9144000" cy="320040"/>
+          </a:xfrm>
+          <a:prstGeom prst="rect">
+            <a:avLst/>
+          </a:prstGeom>
+          <a:noFill/>
+        </p:spPr>
+        <p:txBody>
+          <a:bodyPr wrap="square" lIns="0" rIns="0" tIns="0" bIns="0">
+            <a:spAutoFit/>
+          </a:bodyPr>
+          <a:lstStyle/>
+          <a:p>
+            <a:r>
+              <a:rPr sz="1200" b="1">
+                <a:solidFill>
+                  <a:srgbClr val="F5A623"/>
+                </a:solidFill>
+                <a:latin typeface="Calibri"/>
+              </a:rPr>
+              <a:t>DIFFERENTIATOR D</a:t>
+            </a:r>
+          </a:p>
+        </p:txBody>
+      </p:sp>
+      <p:sp>
+        <p:nvSpPr>
+          <p:cNvPr id="3" name="TextBox 2"/>
+          <p:cNvSpPr txBox="1"/>
+          <p:nvPr/>
+        </p:nvSpPr>
+        <p:spPr>
+          <a:xfrm>
+            <a:off x="548640" y="457200"/>
+            <a:ext cx="11064240" cy="822960"/>
+          </a:xfrm>
+          <a:prstGeom prst="rect">
+            <a:avLst/>
+          </a:prstGeom>
+          <a:noFill/>
+        </p:spPr>
+        <p:txBody>
+          <a:bodyPr wrap="square" lIns="0" rIns="0" tIns="0" bIns="0">
+            <a:spAutoFit/>
+          </a:bodyPr>
+          <a:lstStyle/>
+          <a:p>
+            <a:r>
+              <a:rPr sz="3200" b="1">
+                <a:solidFill>
+                  <a:srgbClr val="1E2761"/>
+                </a:solidFill>
+                <a:latin typeface="Cambria"/>
+              </a:rPr>
+              <a:t>A percentile that says what it is</a:t>
+            </a:r>
+          </a:p>
+        </p:txBody>
+      </p:sp>
+      <p:sp>
+        <p:nvSpPr>
+          <p:cNvPr id="4" name="Rounded Rectangle 3"/>
+          <p:cNvSpPr/>
+          <p:nvPr/>
+        </p:nvSpPr>
+        <p:spPr>
+          <a:xfrm>
+            <a:off x="548640" y="1828800"/>
+            <a:ext cx="3108960" cy="1920240"/>
+          </a:xfrm>
+          <a:prstGeom prst="roundRect">
+            <a:avLst>
+              <a:gd name="adj" fmla="val 8000"/>
+            </a:avLst>
+          </a:prstGeom>
+          <a:solidFill>
+            <a:srgbClr val="F7F8FC"/>
+          </a:solidFill>
+          <a:ln>
+            <a:noFill/>
+          </a:ln>
+          <a:effectLst/>
+        </p:spPr>
+        <p:style>
+          <a:lnRef idx="1">
+            <a:schemeClr val="accent1"/>
+          </a:lnRef>
+          <a:fillRef idx="3">
+            <a:schemeClr val="accent1"/>
+          </a:fillRef>
+          <a:effectRef idx="2">
+            <a:schemeClr val="accent1"/>
+          </a:effectRef>
+          <a:fontRef idx="minor">
+            <a:schemeClr val="lt1"/>
+          </a:fontRef>
+        </p:style>
+        <p:txBody>
+          <a:bodyPr rtlCol="0" anchor="ctr"/>
+          <a:lstStyle/>
+          <a:p>
+            <a:pPr algn="ctr"/>
+          </a:p>
+        </p:txBody>
+      </p:sp>
+      <p:sp>
+        <p:nvSpPr>
+          <p:cNvPr id="5" name="TextBox 4"/>
+          <p:cNvSpPr txBox="1"/>
+          <p:nvPr/>
+        </p:nvSpPr>
+        <p:spPr>
+          <a:xfrm>
+            <a:off x="548640" y="2011680"/>
+            <a:ext cx="3108960" cy="1097280"/>
+          </a:xfrm>
+          <a:prstGeom prst="rect">
+            <a:avLst/>
+          </a:prstGeom>
+          <a:noFill/>
+        </p:spPr>
+        <p:txBody>
+          <a:bodyPr wrap="square" lIns="0" rIns="0" tIns="0" bIns="0">
+            <a:spAutoFit/>
+          </a:bodyPr>
+          <a:lstStyle/>
+          <a:p>
+            <a:pPr algn="ctr"/>
+            <a:r>
+              <a:rPr sz="4000" b="1">
+                <a:solidFill>
+                  <a:srgbClr val="1E2761"/>
+                </a:solidFill>
+                <a:latin typeface="Cambria"/>
+              </a:rPr>
+              <a:t>~86th</a:t>
+            </a:r>
+          </a:p>
+        </p:txBody>
+      </p:sp>
+      <p:sp>
+        <p:nvSpPr>
+          <p:cNvPr id="6" name="TextBox 5"/>
+          <p:cNvSpPr txBox="1"/>
+          <p:nvPr/>
+        </p:nvSpPr>
+        <p:spPr>
+          <a:xfrm>
+            <a:off x="548640" y="3063240"/>
+            <a:ext cx="3108960" cy="457200"/>
+          </a:xfrm>
+          <a:prstGeom prst="rect">
+            <a:avLst/>
+          </a:prstGeom>
+          <a:noFill/>
+        </p:spPr>
+        <p:txBody>
+          <a:bodyPr wrap="square" lIns="0" rIns="0" tIns="0" bIns="0">
+            <a:spAutoFit/>
+          </a:bodyPr>
+          <a:lstStyle/>
+          <a:p>
+            <a:pPr algn="ctr"/>
+            <a:r>
+              <a:rPr sz="1200" b="0">
+                <a:solidFill>
+                  <a:srgbClr val="5B6B8C"/>
+                </a:solidFill>
+                <a:latin typeface="Calibri"/>
+              </a:rPr>
+              <a:t>percentile shown per score</a:t>
+            </a:r>
+          </a:p>
+        </p:txBody>
+      </p:sp>
+      <p:sp>
+        <p:nvSpPr>
+          <p:cNvPr id="7" name="TextBox 6"/>
+          <p:cNvSpPr txBox="1"/>
+          <p:nvPr/>
+        </p:nvSpPr>
+        <p:spPr>
+          <a:xfrm>
+            <a:off x="3977639" y="1874519"/>
+            <a:ext cx="7635240" cy="1920240"/>
+          </a:xfrm>
+          <a:prstGeom prst="rect">
+            <a:avLst/>
+          </a:prstGeom>
+          <a:noFill/>
+        </p:spPr>
+        <p:txBody>
+          <a:bodyPr wrap="square" lIns="0" rIns="0" tIns="0" bIns="0">
+            <a:spAutoFit/>
+          </a:bodyPr>
+          <a:lstStyle/>
+          <a:p>
+            <a:r>
+              <a:rPr sz="1350" b="0">
+                <a:solidFill>
+                  <a:srgbClr val="5B6B8C"/>
+                </a:solidFill>
+                <a:latin typeface="Calibri"/>
+              </a:rPr>
+              <a:t>It would have been easy to phrase this against “other ResumeIQ users.” </a:t>
+            </a:r>
+            <a:r>
+              <a:rPr sz="1350" b="1">
+                <a:solidFill>
+                  <a:srgbClr val="1E2761"/>
+                </a:solidFill>
+                <a:latin typeface="Calibri"/>
+              </a:rPr>
+              <a:t>That data doesn't exist</a:t>
+            </a:r>
+            <a:r>
+              <a:rPr sz="1350" b="0">
+                <a:solidFill>
+                  <a:srgbClr val="5B6B8C"/>
+                </a:solidFill>
+                <a:latin typeface="Calibri"/>
+              </a:rPr>
+              <a:t> -- so the percentile instead comes from a documented normal-distribution model of typical early-career resumes, evaluated with the standard normal CDF, and the UI says exactly that.</a:t>
+            </a:r>
+          </a:p>
+        </p:txBody>
+      </p:sp>
+      <p:sp>
+        <p:nvSpPr>
+          <p:cNvPr id="8" name="Rounded Rectangle 7"/>
+          <p:cNvSpPr/>
+          <p:nvPr/>
+        </p:nvSpPr>
+        <p:spPr>
+          <a:xfrm>
+            <a:off x="548640" y="4297680"/>
+            <a:ext cx="11064240" cy="2148840"/>
+          </a:xfrm>
+          <a:prstGeom prst="roundRect">
+            <a:avLst>
+              <a:gd name="adj" fmla="val 8000"/>
+            </a:avLst>
+          </a:prstGeom>
+          <a:solidFill>
+            <a:srgbClr val="1E2761"/>
+          </a:solidFill>
+          <a:ln>
+            <a:noFill/>
+          </a:ln>
+          <a:effectLst/>
+        </p:spPr>
+        <p:style>
+          <a:lnRef idx="1">
+            <a:schemeClr val="accent1"/>
+          </a:lnRef>
+          <a:fillRef idx="3">
+            <a:schemeClr val="accent1"/>
+          </a:fillRef>
+          <a:effectRef idx="2">
+            <a:schemeClr val="accent1"/>
+          </a:effectRef>
+          <a:fontRef idx="minor">
+            <a:schemeClr val="lt1"/>
+          </a:fontRef>
+        </p:style>
+        <p:txBody>
+          <a:bodyPr rtlCol="0" anchor="ctr"/>
+          <a:lstStyle/>
+          <a:p>
+            <a:pPr algn="ctr"/>
+          </a:p>
+        </p:txBody>
+      </p:sp>
+      <p:sp>
+        <p:nvSpPr>
+          <p:cNvPr id="9" name="TextBox 8"/>
+          <p:cNvSpPr txBox="1"/>
+          <p:nvPr/>
+        </p:nvSpPr>
+        <p:spPr>
+          <a:xfrm>
+            <a:off x="868680" y="4434840"/>
+            <a:ext cx="7589520" cy="1874520"/>
+          </a:xfrm>
+          <a:prstGeom prst="rect">
+            <a:avLst/>
+          </a:prstGeom>
+          <a:noFill/>
+        </p:spPr>
+        <p:txBody>
+          <a:bodyPr wrap="square" lIns="0" rIns="0" tIns="0" bIns="0">
+            <a:spAutoFit/>
+          </a:bodyPr>
+          <a:lstStyle/>
+          <a:p>
+            <a:r>
+              <a:rPr sz="1300" b="0">
+                <a:solidFill>
+                  <a:srgbClr val="FFFFFF"/>
+                </a:solidFill>
+                <a:latin typeface="Calibri"/>
+              </a:rPr>
+              <a:t>“Read it as </a:t>
+            </a:r>
+            <a:r>
+              <a:rPr sz="1300" b="1">
+                <a:solidFill>
+                  <a:srgbClr val="F5A623"/>
+                </a:solidFill>
+                <a:latin typeface="Calibri"/>
+              </a:rPr>
+              <a:t>vs. a typical early-career resume,</a:t>
+            </a:r>
+            <a:r>
+              <a:rPr sz="1300" b="0">
+                <a:solidFill>
+                  <a:srgbClr val="FFFFFF"/>
+                </a:solidFill>
+                <a:latin typeface="Calibri"/>
+              </a:rPr>
+              <a:t> not vs. everyone who's used this tool.”</a:t>
+            </a:r>
+            <a:r>
+              <a:rPr sz="1300" b="0">
+                <a:solidFill>
+                  <a:srgbClr val="FFFFFF"/>
+                </a:solidFill>
+                <a:latin typeface="Calibri"/>
+              </a:rPr>
+              <a:t> -- the FAQ answers this question directly, in these words, for anyone who asks.</a:t>
+            </a:r>
+          </a:p>
+        </p:txBody>
+      </p:sp>
+      <p:sp>
+        <p:nvSpPr>
+          <p:cNvPr id="10" name="TextBox 9"/>
+          <p:cNvSpPr txBox="1"/>
+          <p:nvPr/>
+        </p:nvSpPr>
+        <p:spPr>
+          <a:xfrm>
+            <a:off x="11475720" y="6446520"/>
+            <a:ext cx="548640" cy="320040"/>
+          </a:xfrm>
+          <a:prstGeom prst="rect">
+            <a:avLst/>
+          </a:prstGeom>
+          <a:noFill/>
+        </p:spPr>
+        <p:txBody>
+          <a:bodyPr wrap="square" lIns="0" rIns="0" tIns="0" bIns="0">
+            <a:spAutoFit/>
+          </a:bodyPr>
+          <a:lstStyle/>
+          <a:p>
+            <a:pPr algn="r"/>
+            <a:r>
+              <a:rPr sz="1000" b="0">
+                <a:solidFill>
+                  <a:srgbClr val="5B6B8C"/>
+                </a:solidFill>
+                <a:latin typeface="Calibri"/>
+              </a:rPr>
+              <a:t>14</a:t>
+            </a:r>
+          </a:p>
+        </p:txBody>
+      </p:sp>
+    </p:spTree>
+  </p:cSld>
+  <p:clrMapOvr>
+    <a:masterClrMapping/>
+  </p:clrMapOvr>
+</p:sld>
+</file>
+
+<file path=ppt/slides/slide16.xml><?xml version="1.0" encoding="utf-8"?>
+<p:sld xmlns:a="http://schemas.openxmlformats.org/drawingml/2006/main" xmlns:p="http://schemas.openxmlformats.org/presentationml/2006/main" xmlns:r="http://schemas.openxmlformats.org/officeDocument/2006/relationships">
+  <p:cSld>
+    <p:bg>
+      <p:bgPr>
+        <a:solidFill>
+          <a:srgbClr val="FFFFFF"/>
+        </a:solidFill>
+        <a:effectLst/>
+      </p:bgPr>
+    </p:bg>
+    <p:spTree>
+      <p:nvGrpSpPr>
+        <p:cNvPr id="1" name=""/>
+        <p:cNvGrpSpPr/>
+        <p:nvPr/>
+      </p:nvGrpSpPr>
+      <p:grpSpPr/>
+      <p:sp>
+        <p:nvSpPr>
+          <p:cNvPr id="2" name="TextBox 1"/>
+          <p:cNvSpPr txBox="1"/>
+          <p:nvPr/>
+        </p:nvSpPr>
+        <p:spPr>
+          <a:xfrm>
+            <a:off x="548640" y="256032"/>
+            <a:ext cx="9144000" cy="320040"/>
+          </a:xfrm>
+          <a:prstGeom prst="rect">
+            <a:avLst/>
+          </a:prstGeom>
+          <a:noFill/>
+        </p:spPr>
+        <p:txBody>
+          <a:bodyPr wrap="square" lIns="0" rIns="0" tIns="0" bIns="0">
+            <a:spAutoFit/>
+          </a:bodyPr>
+          <a:lstStyle/>
+          <a:p>
+            <a:r>
+              <a:rPr sz="1200" b="1">
+                <a:solidFill>
+                  <a:srgbClr val="F5A623"/>
+                </a:solidFill>
+                <a:latin typeface="Calibri"/>
+              </a:rPr>
+              <a:t>DIFFERENTIATOR E</a:t>
+            </a:r>
+          </a:p>
+        </p:txBody>
+      </p:sp>
+      <p:sp>
+        <p:nvSpPr>
+          <p:cNvPr id="3" name="TextBox 2"/>
+          <p:cNvSpPr txBox="1"/>
+          <p:nvPr/>
+        </p:nvSpPr>
+        <p:spPr>
+          <a:xfrm>
+            <a:off x="548640" y="457200"/>
+            <a:ext cx="11064240" cy="822960"/>
+          </a:xfrm>
+          <a:prstGeom prst="rect">
+            <a:avLst/>
+          </a:prstGeom>
+          <a:noFill/>
+        </p:spPr>
+        <p:txBody>
+          <a:bodyPr wrap="square" lIns="0" rIns="0" tIns="0" bIns="0">
+            <a:spAutoFit/>
+          </a:bodyPr>
+          <a:lstStyle/>
+          <a:p>
+            <a:r>
+              <a:rPr sz="3200" b="1">
+                <a:solidFill>
+                  <a:srgbClr val="1E2761"/>
+                </a:solidFill>
+                <a:latin typeface="Cambria"/>
+              </a:rPr>
+              <a:t>A real PDF, not a browser printout</a:t>
+            </a:r>
+          </a:p>
+        </p:txBody>
+      </p:sp>
+      <p:sp>
+        <p:nvSpPr>
+          <p:cNvPr id="4" name="Rounded Rectangle 3"/>
+          <p:cNvSpPr/>
+          <p:nvPr/>
+        </p:nvSpPr>
+        <p:spPr>
+          <a:xfrm>
+            <a:off x="548640" y="1828800"/>
+            <a:ext cx="11064240" cy="1051560"/>
+          </a:xfrm>
+          <a:prstGeom prst="roundRect">
+            <a:avLst>
+              <a:gd name="adj" fmla="val 8000"/>
+            </a:avLst>
+          </a:prstGeom>
+          <a:solidFill>
+            <a:srgbClr val="F7F8FC"/>
+          </a:solidFill>
+          <a:ln>
+            <a:noFill/>
+          </a:ln>
+          <a:effectLst/>
+        </p:spPr>
+        <p:style>
+          <a:lnRef idx="1">
+            <a:schemeClr val="accent1"/>
+          </a:lnRef>
+          <a:fillRef idx="3">
+            <a:schemeClr val="accent1"/>
+          </a:fillRef>
+          <a:effectRef idx="2">
+            <a:schemeClr val="accent1"/>
+          </a:effectRef>
+          <a:fontRef idx="minor">
+            <a:schemeClr val="lt1"/>
+          </a:fontRef>
+        </p:style>
+        <p:txBody>
+          <a:bodyPr rtlCol="0" anchor="ctr"/>
+          <a:lstStyle/>
+          <a:p>
+            <a:pPr algn="ctr"/>
+          </a:p>
+        </p:txBody>
+      </p:sp>
+      <p:sp>
+        <p:nvSpPr>
+          <p:cNvPr id="5" name="TextBox 4"/>
+          <p:cNvSpPr txBox="1"/>
+          <p:nvPr/>
+        </p:nvSpPr>
+        <p:spPr>
+          <a:xfrm>
+            <a:off x="868680" y="1956816"/>
+            <a:ext cx="2743200" cy="822960"/>
+          </a:xfrm>
+          <a:prstGeom prst="rect">
+            <a:avLst/>
+          </a:prstGeom>
+          <a:noFill/>
+        </p:spPr>
+        <p:txBody>
+          <a:bodyPr wrap="square" lIns="0" rIns="0" tIns="0" bIns="0">
+            <a:spAutoFit/>
+          </a:bodyPr>
+          <a:lstStyle/>
+          <a:p>
+            <a:r>
+              <a:rPr sz="1500" b="1">
+                <a:solidFill>
+                  <a:srgbClr val="1E2761"/>
+                </a:solidFill>
+                <a:latin typeface="Calibri"/>
+              </a:rPr>
+              <a:t>What's in it</a:t>
+            </a:r>
+          </a:p>
+        </p:txBody>
+      </p:sp>
+      <p:sp>
+        <p:nvSpPr>
+          <p:cNvPr id="6" name="TextBox 5"/>
+          <p:cNvSpPr txBox="1"/>
+          <p:nvPr/>
+        </p:nvSpPr>
+        <p:spPr>
+          <a:xfrm>
+            <a:off x="3749039" y="1956816"/>
+            <a:ext cx="6035040" cy="822960"/>
+          </a:xfrm>
+          <a:prstGeom prst="rect">
+            <a:avLst/>
+          </a:prstGeom>
+          <a:noFill/>
+        </p:spPr>
+        <p:txBody>
+          <a:bodyPr wrap="square" lIns="0" rIns="0" tIns="0" bIns="0">
+            <a:spAutoFit/>
+          </a:bodyPr>
+          <a:lstStyle/>
+          <a:p>
+            <a:r>
+              <a:rPr sz="1200" b="0">
+                <a:solidFill>
+                  <a:srgbClr val="5B6B8C"/>
+                </a:solidFill>
+                <a:latin typeface="Calibri"/>
+              </a:rPr>
+              <a:t>Score summary, the breakdown table, ATS keyword results, the role-fit table, the impact table, and the feedback list</a:t>
+            </a:r>
+          </a:p>
+        </p:txBody>
+      </p:sp>
+      <p:sp>
+        <p:nvSpPr>
+          <p:cNvPr id="7" name="TextBox 6"/>
+          <p:cNvSpPr txBox="1"/>
+          <p:nvPr/>
+        </p:nvSpPr>
+        <p:spPr>
+          <a:xfrm>
+            <a:off x="9875520" y="1956816"/>
+            <a:ext cx="1554480" cy="822960"/>
+          </a:xfrm>
+          <a:prstGeom prst="rect">
+            <a:avLst/>
+          </a:prstGeom>
+          <a:noFill/>
+        </p:spPr>
+        <p:txBody>
+          <a:bodyPr wrap="square" lIns="0" rIns="0" tIns="0" bIns="0">
+            <a:spAutoFit/>
+          </a:bodyPr>
+          <a:lstStyle/>
+          <a:p>
+            <a:pPr algn="r"/>
+            <a:r>
+              <a:rPr sz="1500" b="1">
+                <a:solidFill>
+                  <a:srgbClr val="F5A623"/>
+                </a:solidFill>
+                <a:latin typeface="Calibri"/>
+              </a:rPr>
+              <a:t>6 sections</a:t>
+            </a:r>
+          </a:p>
+        </p:txBody>
+      </p:sp>
+      <p:sp>
+        <p:nvSpPr>
+          <p:cNvPr id="8" name="Rounded Rectangle 7"/>
+          <p:cNvSpPr/>
+          <p:nvPr/>
+        </p:nvSpPr>
+        <p:spPr>
+          <a:xfrm>
+            <a:off x="548640" y="3063240"/>
+            <a:ext cx="11064240" cy="1051560"/>
+          </a:xfrm>
+          <a:prstGeom prst="roundRect">
+            <a:avLst>
+              <a:gd name="adj" fmla="val 8000"/>
+            </a:avLst>
+          </a:prstGeom>
+          <a:solidFill>
+            <a:srgbClr val="F7F8FC"/>
+          </a:solidFill>
+          <a:ln>
+            <a:noFill/>
+          </a:ln>
+          <a:effectLst/>
+        </p:spPr>
+        <p:style>
+          <a:lnRef idx="1">
+            <a:schemeClr val="accent1"/>
+          </a:lnRef>
+          <a:fillRef idx="3">
+            <a:schemeClr val="accent1"/>
+          </a:fillRef>
+          <a:effectRef idx="2">
+            <a:schemeClr val="accent1"/>
+          </a:effectRef>
+          <a:fontRef idx="minor">
+            <a:schemeClr val="lt1"/>
+          </a:fontRef>
+        </p:style>
+        <p:txBody>
+          <a:bodyPr rtlCol="0" anchor="ctr"/>
+          <a:lstStyle/>
+          <a:p>
+            <a:pPr algn="ctr"/>
+          </a:p>
+        </p:txBody>
+      </p:sp>
+      <p:sp>
+        <p:nvSpPr>
+          <p:cNvPr id="9" name="TextBox 8"/>
+          <p:cNvSpPr txBox="1"/>
+          <p:nvPr/>
+        </p:nvSpPr>
+        <p:spPr>
+          <a:xfrm>
+            <a:off x="868680" y="3191256"/>
+            <a:ext cx="2743200" cy="822960"/>
+          </a:xfrm>
+          <a:prstGeom prst="rect">
+            <a:avLst/>
+          </a:prstGeom>
+          <a:noFill/>
+        </p:spPr>
+        <p:txBody>
+          <a:bodyPr wrap="square" lIns="0" rIns="0" tIns="0" bIns="0">
+            <a:spAutoFit/>
+          </a:bodyPr>
+          <a:lstStyle/>
+          <a:p>
+            <a:r>
+              <a:rPr sz="1500" b="1">
+                <a:solidFill>
+                  <a:srgbClr val="1E2761"/>
+                </a:solidFill>
+                <a:latin typeface="Calibri"/>
+              </a:rPr>
+              <a:t>Why reportlab</a:t>
+            </a:r>
+          </a:p>
+        </p:txBody>
+      </p:sp>
+      <p:sp>
+        <p:nvSpPr>
+          <p:cNvPr id="10" name="TextBox 9"/>
+          <p:cNvSpPr txBox="1"/>
+          <p:nvPr/>
+        </p:nvSpPr>
+        <p:spPr>
+          <a:xfrm>
+            <a:off x="3749039" y="3191256"/>
+            <a:ext cx="6035040" cy="822960"/>
+          </a:xfrm>
+          <a:prstGeom prst="rect">
+            <a:avLst/>
+          </a:prstGeom>
+          <a:noFill/>
+        </p:spPr>
+        <p:txBody>
+          <a:bodyPr wrap="square" lIns="0" rIns="0" tIns="0" bIns="0">
+            <a:spAutoFit/>
+          </a:bodyPr>
+          <a:lstStyle/>
+          <a:p>
+            <a:r>
+              <a:rPr sz="1200" b="0">
+                <a:solidFill>
+                  <a:srgbClr val="5B6B8C"/>
+                </a:solidFill>
+                <a:latin typeface="Calibri"/>
+              </a:rPr>
+              <a:t>Pure-Python wheels -- deploys on Render's plain “pip install” build step; weasyprint/wkhtmltopdf both need native libraries that step can't install</a:t>
+            </a:r>
+          </a:p>
+        </p:txBody>
+      </p:sp>
+      <p:sp>
+        <p:nvSpPr>
+          <p:cNvPr id="11" name="TextBox 10"/>
+          <p:cNvSpPr txBox="1"/>
+          <p:nvPr/>
+        </p:nvSpPr>
+        <p:spPr>
+          <a:xfrm>
+            <a:off x="9875520" y="3191256"/>
+            <a:ext cx="1554480" cy="822960"/>
+          </a:xfrm>
+          <a:prstGeom prst="rect">
+            <a:avLst/>
+          </a:prstGeom>
+          <a:noFill/>
+        </p:spPr>
+        <p:txBody>
+          <a:bodyPr wrap="square" lIns="0" rIns="0" tIns="0" bIns="0">
+            <a:spAutoFit/>
+          </a:bodyPr>
+          <a:lstStyle/>
+          <a:p>
+            <a:pPr algn="r"/>
+            <a:r>
+              <a:rPr sz="1500" b="1">
+                <a:solidFill>
+                  <a:srgbClr val="F5A623"/>
+                </a:solidFill>
+                <a:latin typeface="Calibri"/>
+              </a:rPr>
+              <a:t>no apt-get</a:t>
+            </a:r>
+          </a:p>
+        </p:txBody>
+      </p:sp>
+      <p:sp>
+        <p:nvSpPr>
+          <p:cNvPr id="12" name="Rounded Rectangle 11"/>
+          <p:cNvSpPr/>
+          <p:nvPr/>
+        </p:nvSpPr>
+        <p:spPr>
+          <a:xfrm>
+            <a:off x="548640" y="4297680"/>
+            <a:ext cx="11064240" cy="1051560"/>
+          </a:xfrm>
+          <a:prstGeom prst="roundRect">
+            <a:avLst>
+              <a:gd name="adj" fmla="val 8000"/>
+            </a:avLst>
+          </a:prstGeom>
+          <a:solidFill>
+            <a:srgbClr val="F7F8FC"/>
+          </a:solidFill>
+          <a:ln>
+            <a:noFill/>
+          </a:ln>
+          <a:effectLst/>
+        </p:spPr>
+        <p:style>
+          <a:lnRef idx="1">
+            <a:schemeClr val="accent1"/>
+          </a:lnRef>
+          <a:fillRef idx="3">
+            <a:schemeClr val="accent1"/>
+          </a:fillRef>
+          <a:effectRef idx="2">
+            <a:schemeClr val="accent1"/>
+          </a:effectRef>
+          <a:fontRef idx="minor">
+            <a:schemeClr val="lt1"/>
+          </a:fontRef>
+        </p:style>
+        <p:txBody>
+          <a:bodyPr rtlCol="0" anchor="ctr"/>
+          <a:lstStyle/>
+          <a:p>
+            <a:pPr algn="ctr"/>
+          </a:p>
+        </p:txBody>
+      </p:sp>
+      <p:sp>
+        <p:nvSpPr>
+          <p:cNvPr id="13" name="TextBox 12"/>
+          <p:cNvSpPr txBox="1"/>
+          <p:nvPr/>
+        </p:nvSpPr>
+        <p:spPr>
+          <a:xfrm>
+            <a:off x="868680" y="4425696"/>
+            <a:ext cx="2743200" cy="822960"/>
+          </a:xfrm>
+          <a:prstGeom prst="rect">
+            <a:avLst/>
+          </a:prstGeom>
+          <a:noFill/>
+        </p:spPr>
+        <p:txBody>
+          <a:bodyPr wrap="square" lIns="0" rIns="0" tIns="0" bIns="0">
+            <a:spAutoFit/>
+          </a:bodyPr>
+          <a:lstStyle/>
+          <a:p>
+            <a:r>
+              <a:rPr sz="1500" b="1">
+                <a:solidFill>
+                  <a:srgbClr val="1E2761"/>
+                </a:solidFill>
+                <a:latin typeface="Calibri"/>
+              </a:rPr>
+              <a:t>Built independently</a:t>
+            </a:r>
+          </a:p>
+        </p:txBody>
+      </p:sp>
+      <p:sp>
+        <p:nvSpPr>
+          <p:cNvPr id="14" name="TextBox 13"/>
+          <p:cNvSpPr txBox="1"/>
+          <p:nvPr/>
+        </p:nvSpPr>
+        <p:spPr>
+          <a:xfrm>
+            <a:off x="3749039" y="4425696"/>
+            <a:ext cx="6035040" cy="822960"/>
+          </a:xfrm>
+          <a:prstGeom prst="rect">
+            <a:avLst/>
+          </a:prstGeom>
+          <a:noFill/>
+        </p:spPr>
+        <p:txBody>
+          <a:bodyPr wrap="square" lIns="0" rIns="0" tIns="0" bIns="0">
+            <a:spAutoFit/>
+          </a:bodyPr>
+          <a:lstStyle/>
+          <a:p>
+            <a:r>
+              <a:rPr sz="1200" b="0">
+                <a:solidFill>
+                  <a:srgbClr val="5B6B8C"/>
+                </a:solidFill>
+                <a:latin typeface="Calibri"/>
+              </a:rPr>
+              <a:t>Its own layout in code, not a conversion of the Tailwind dashboard -- reliable across every browser and OS, not just the one that rendered a print preview</a:t>
+            </a:r>
+          </a:p>
+        </p:txBody>
+      </p:sp>
+      <p:sp>
+        <p:nvSpPr>
+          <p:cNvPr id="15" name="TextBox 14"/>
+          <p:cNvSpPr txBox="1"/>
+          <p:nvPr/>
+        </p:nvSpPr>
+        <p:spPr>
+          <a:xfrm>
+            <a:off x="9875520" y="4425696"/>
+            <a:ext cx="1554480" cy="822960"/>
+          </a:xfrm>
+          <a:prstGeom prst="rect">
+            <a:avLst/>
+          </a:prstGeom>
+          <a:noFill/>
+        </p:spPr>
+        <p:txBody>
+          <a:bodyPr wrap="square" lIns="0" rIns="0" tIns="0" bIns="0">
+            <a:spAutoFit/>
+          </a:bodyPr>
+          <a:lstStyle/>
+          <a:p>
+            <a:pPr algn="r"/>
+            <a:r>
+              <a:rPr sz="1500" b="1">
+                <a:solidFill>
+                  <a:srgbClr val="F5A623"/>
+                </a:solidFill>
+                <a:latin typeface="Calibri"/>
+              </a:rPr>
+              <a:t>server-side</a:t>
+            </a:r>
+          </a:p>
+        </p:txBody>
+      </p:sp>
+      <p:sp>
+        <p:nvSpPr>
+          <p:cNvPr id="16" name="Rounded Rectangle 15"/>
+          <p:cNvSpPr/>
+          <p:nvPr/>
+        </p:nvSpPr>
+        <p:spPr>
+          <a:xfrm>
+            <a:off x="548640" y="5440680"/>
+            <a:ext cx="11064240" cy="1005840"/>
+          </a:xfrm>
+          <a:prstGeom prst="roundRect">
+            <a:avLst>
+              <a:gd name="adj" fmla="val 8000"/>
+            </a:avLst>
+          </a:prstGeom>
+          <a:solidFill>
+            <a:srgbClr val="1E2761"/>
+          </a:solidFill>
+          <a:ln>
+            <a:noFill/>
+          </a:ln>
+          <a:effectLst/>
+        </p:spPr>
+        <p:style>
+          <a:lnRef idx="1">
+            <a:schemeClr val="accent1"/>
+          </a:lnRef>
+          <a:fillRef idx="3">
+            <a:schemeClr val="accent1"/>
+          </a:fillRef>
+          <a:effectRef idx="2">
+            <a:schemeClr val="accent1"/>
+          </a:effectRef>
+          <a:fontRef idx="minor">
+            <a:schemeClr val="lt1"/>
+          </a:fontRef>
+        </p:style>
+        <p:txBody>
+          <a:bodyPr rtlCol="0" anchor="ctr"/>
+          <a:lstStyle/>
+          <a:p>
+            <a:pPr algn="ctr"/>
+          </a:p>
+        </p:txBody>
+      </p:sp>
+      <p:sp>
+        <p:nvSpPr>
+          <p:cNvPr id="17" name="TextBox 16"/>
+          <p:cNvSpPr txBox="1"/>
+          <p:nvPr/>
+        </p:nvSpPr>
+        <p:spPr>
+          <a:xfrm>
+            <a:off x="868680" y="5577840"/>
+            <a:ext cx="7589520" cy="731520"/>
+          </a:xfrm>
+          <a:prstGeom prst="rect">
+            <a:avLst/>
+          </a:prstGeom>
+          <a:noFill/>
+        </p:spPr>
+        <p:txBody>
+          <a:bodyPr wrap="square" lIns="0" rIns="0" tIns="0" bIns="0">
+            <a:spAutoFit/>
+          </a:bodyPr>
+          <a:lstStyle/>
+          <a:p>
+            <a:r>
+              <a:rPr sz="1300" b="1">
+                <a:solidFill>
+                  <a:srgbClr val="F5A623"/>
+                </a:solidFill>
+                <a:latin typeface="Calibri"/>
+              </a:rPr>
+              <a:t>The old “Print / Save as PDF” button stays too</a:t>
+            </a:r>
+            <a:r>
+              <a:rPr sz="1300" b="0">
+                <a:solidFill>
+                  <a:srgbClr val="FFFFFF"/>
+                </a:solidFill>
+                <a:latin typeface="Calibri"/>
+              </a:rPr>
+              <a:t> -- for a literal copy of the on-screen page, next to the new formatted download.</a:t>
+            </a:r>
+          </a:p>
+        </p:txBody>
+      </p:sp>
+      <p:sp>
+        <p:nvSpPr>
+          <p:cNvPr id="18" name="TextBox 17"/>
+          <p:cNvSpPr txBox="1"/>
+          <p:nvPr/>
+        </p:nvSpPr>
+        <p:spPr>
+          <a:xfrm>
+            <a:off x="11475720" y="6446520"/>
+            <a:ext cx="548640" cy="320040"/>
+          </a:xfrm>
+          <a:prstGeom prst="rect">
+            <a:avLst/>
+          </a:prstGeom>
+          <a:noFill/>
+        </p:spPr>
+        <p:txBody>
+          <a:bodyPr wrap="square" lIns="0" rIns="0" tIns="0" bIns="0">
+            <a:spAutoFit/>
+          </a:bodyPr>
+          <a:lstStyle/>
+          <a:p>
+            <a:pPr algn="r"/>
+            <a:r>
+              <a:rPr sz="1000" b="0">
+                <a:solidFill>
+                  <a:srgbClr val="5B6B8C"/>
+                </a:solidFill>
+                <a:latin typeface="Calibri"/>
+              </a:rPr>
+              <a:t>15</a:t>
+            </a:r>
+          </a:p>
+        </p:txBody>
+      </p:sp>
+    </p:spTree>
+  </p:cSld>
+  <p:clrMapOvr>
+    <a:masterClrMapping/>
+  </p:clrMapOvr>
+</p:sld>
+</file>
+
+<file path=ppt/slides/slide17.xml><?xml version="1.0" encoding="utf-8"?>
+<p:sld xmlns:a="http://schemas.openxmlformats.org/drawingml/2006/main" xmlns:p="http://schemas.openxmlformats.org/presentationml/2006/main" xmlns:r="http://schemas.openxmlformats.org/officeDocument/2006/relationships">
+  <p:cSld>
+    <p:bg>
+      <p:bgPr>
+        <a:solidFill>
+          <a:srgbClr val="FFFFFF"/>
+        </a:solidFill>
+        <a:effectLst/>
+      </p:bgPr>
+    </p:bg>
+    <p:spTree>
+      <p:nvGrpSpPr>
+        <p:cNvPr id="1" name=""/>
+        <p:cNvGrpSpPr/>
+        <p:nvPr/>
+      </p:nvGrpSpPr>
+      <p:grpSpPr/>
+      <p:sp>
+        <p:nvSpPr>
+          <p:cNvPr id="2" name="TextBox 1"/>
+          <p:cNvSpPr txBox="1"/>
+          <p:nvPr/>
+        </p:nvSpPr>
+        <p:spPr>
+          <a:xfrm>
+            <a:off x="548640" y="256032"/>
+            <a:ext cx="9144000" cy="320040"/>
+          </a:xfrm>
+          <a:prstGeom prst="rect">
+            <a:avLst/>
+          </a:prstGeom>
+          <a:noFill/>
+        </p:spPr>
+        <p:txBody>
+          <a:bodyPr wrap="square" lIns="0" rIns="0" tIns="0" bIns="0">
+            <a:spAutoFit/>
+          </a:bodyPr>
+          <a:lstStyle/>
+          <a:p>
+            <a:r>
+              <a:rPr sz="1200" b="1">
+                <a:solidFill>
+                  <a:srgbClr val="F5A623"/>
+                </a:solidFill>
+                <a:latin typeface="Calibri"/>
+              </a:rPr>
+              <a:t>WHAT ELSE CHANGED</a:t>
+            </a:r>
+          </a:p>
+        </p:txBody>
+      </p:sp>
+      <p:sp>
+        <p:nvSpPr>
+          <p:cNvPr id="3" name="TextBox 2"/>
+          <p:cNvSpPr txBox="1"/>
+          <p:nvPr/>
+        </p:nvSpPr>
+        <p:spPr>
+          <a:xfrm>
+            <a:off x="548640" y="457200"/>
+            <a:ext cx="11064240" cy="822960"/>
+          </a:xfrm>
+          <a:prstGeom prst="rect">
+            <a:avLst/>
+          </a:prstGeom>
+          <a:noFill/>
+        </p:spPr>
+        <p:txBody>
+          <a:bodyPr wrap="square" lIns="0" rIns="0" tIns="0" bIns="0">
+            <a:spAutoFit/>
+          </a:bodyPr>
+          <a:lstStyle/>
+          <a:p>
+            <a:r>
+              <a:rPr sz="3200" b="1">
+                <a:solidFill>
+                  <a:srgbClr val="1E2761"/>
+                </a:solidFill>
+                <a:latin typeface="Cambria"/>
+              </a:rPr>
+              <a:t>A visual system, not just new features</a:t>
+            </a:r>
+          </a:p>
+        </p:txBody>
+      </p:sp>
+      <p:pic>
+        <p:nvPicPr>
+          <p:cNvPr id="4" name="Picture 3" descr="hero_crop.png"/>
+          <p:cNvPicPr>
+            <a:picLocks noChangeAspect="1"/>
+          </p:cNvPicPr>
+          <p:nvPr/>
+        </p:nvPicPr>
+        <p:blipFill>
+          <a:blip r:embed="rId2"/>
+          <a:stretch>
+            <a:fillRect/>
+          </a:stretch>
+        </p:blipFill>
+        <p:spPr>
+          <a:xfrm>
+            <a:off x="548640" y="1828800"/>
+            <a:ext cx="8187397" cy="4434840"/>
+          </a:xfrm>
+          <a:prstGeom prst="rect">
+            <a:avLst/>
+          </a:prstGeom>
+          <a:ln w="12700">
+            <a:solidFill>
+              <a:srgbClr val="E4E7EF"/>
+            </a:solidFill>
+          </a:ln>
+        </p:spPr>
+      </p:pic>
+      <p:sp>
+        <p:nvSpPr>
+          <p:cNvPr id="5" name="Oval 4"/>
+          <p:cNvSpPr/>
+          <p:nvPr/>
+        </p:nvSpPr>
+        <p:spPr>
+          <a:xfrm>
+            <a:off x="8001000" y="1929384"/>
+            <a:ext cx="128016" cy="128016"/>
+          </a:xfrm>
+          <a:prstGeom prst="ellipse">
+            <a:avLst/>
+          </a:prstGeom>
+          <a:solidFill>
+            <a:srgbClr val="F5A623"/>
+          </a:solidFill>
+          <a:ln>
+            <a:noFill/>
+          </a:ln>
+          <a:effectLst/>
+        </p:spPr>
+        <p:style>
+          <a:lnRef idx="1">
+            <a:schemeClr val="accent1"/>
+          </a:lnRef>
+          <a:fillRef idx="3">
+            <a:schemeClr val="accent1"/>
+          </a:fillRef>
+          <a:effectRef idx="2">
+            <a:schemeClr val="accent1"/>
+          </a:effectRef>
+          <a:fontRef idx="minor">
+            <a:schemeClr val="lt1"/>
+          </a:fontRef>
+        </p:style>
+        <p:txBody>
+          <a:bodyPr rtlCol="0" anchor="ctr"/>
+          <a:lstStyle/>
+          <a:p>
+            <a:pPr algn="ctr"/>
+          </a:p>
+        </p:txBody>
+      </p:sp>
+      <p:sp>
+        <p:nvSpPr>
+          <p:cNvPr id="6" name="TextBox 5"/>
+          <p:cNvSpPr txBox="1"/>
+          <p:nvPr/>
+        </p:nvSpPr>
+        <p:spPr>
+          <a:xfrm>
+            <a:off x="8275320" y="1874519"/>
+            <a:ext cx="3337560" cy="320040"/>
+          </a:xfrm>
+          <a:prstGeom prst="rect">
+            <a:avLst/>
+          </a:prstGeom>
+          <a:noFill/>
+        </p:spPr>
+        <p:txBody>
+          <a:bodyPr wrap="square" lIns="0" rIns="0" tIns="0" bIns="0">
+            <a:spAutoFit/>
+          </a:bodyPr>
+          <a:lstStyle/>
+          <a:p>
+            <a:r>
+              <a:rPr sz="1500" b="1">
+                <a:solidFill>
+                  <a:srgbClr val="1E2761"/>
+                </a:solidFill>
+                <a:latin typeface="Calibri"/>
+              </a:rPr>
+              <a:t>Shared button system</a:t>
+            </a:r>
+          </a:p>
+        </p:txBody>
+      </p:sp>
+      <p:sp>
+        <p:nvSpPr>
+          <p:cNvPr id="7" name="TextBox 6"/>
+          <p:cNvSpPr txBox="1"/>
+          <p:nvPr/>
+        </p:nvSpPr>
+        <p:spPr>
+          <a:xfrm>
+            <a:off x="8275320" y="2258568"/>
+            <a:ext cx="3337560" cy="868680"/>
+          </a:xfrm>
+          <a:prstGeom prst="rect">
+            <a:avLst/>
+          </a:prstGeom>
+          <a:noFill/>
+        </p:spPr>
+        <p:txBody>
+          <a:bodyPr wrap="square" lIns="0" rIns="0" tIns="0" bIns="0">
+            <a:spAutoFit/>
+          </a:bodyPr>
+          <a:lstStyle/>
+          <a:p>
+            <a:r>
+              <a:rPr sz="1200" b="0">
+                <a:solidFill>
+                  <a:srgbClr val="5B6B8C"/>
+                </a:solidFill>
+                <a:latin typeface="Calibri"/>
+              </a:rPr>
+              <a:t>One neon indigo/amber component used everywhere, replacing three separate ad hoc button styles.</a:t>
+            </a:r>
+          </a:p>
+        </p:txBody>
+      </p:sp>
+      <p:sp>
+        <p:nvSpPr>
+          <p:cNvPr id="8" name="Oval 7"/>
+          <p:cNvSpPr/>
+          <p:nvPr/>
+        </p:nvSpPr>
+        <p:spPr>
+          <a:xfrm>
+            <a:off x="8001000" y="3346703"/>
+            <a:ext cx="128016" cy="128016"/>
+          </a:xfrm>
+          <a:prstGeom prst="ellipse">
+            <a:avLst/>
+          </a:prstGeom>
+          <a:solidFill>
+            <a:srgbClr val="F5A623"/>
+          </a:solidFill>
+          <a:ln>
+            <a:noFill/>
+          </a:ln>
+          <a:effectLst/>
+        </p:spPr>
+        <p:style>
+          <a:lnRef idx="1">
+            <a:schemeClr val="accent1"/>
+          </a:lnRef>
+          <a:fillRef idx="3">
+            <a:schemeClr val="accent1"/>
+          </a:fillRef>
+          <a:effectRef idx="2">
+            <a:schemeClr val="accent1"/>
+          </a:effectRef>
+          <a:fontRef idx="minor">
+            <a:schemeClr val="lt1"/>
+          </a:fontRef>
+        </p:style>
+        <p:txBody>
+          <a:bodyPr rtlCol="0" anchor="ctr"/>
+          <a:lstStyle/>
+          <a:p>
+            <a:pPr algn="ctr"/>
+          </a:p>
+        </p:txBody>
+      </p:sp>
+      <p:sp>
+        <p:nvSpPr>
+          <p:cNvPr id="9" name="TextBox 8"/>
+          <p:cNvSpPr txBox="1"/>
+          <p:nvPr/>
+        </p:nvSpPr>
+        <p:spPr>
+          <a:xfrm>
+            <a:off x="8275320" y="3291839"/>
+            <a:ext cx="3337560" cy="320040"/>
+          </a:xfrm>
+          <a:prstGeom prst="rect">
+            <a:avLst/>
+          </a:prstGeom>
+          <a:noFill/>
+        </p:spPr>
+        <p:txBody>
+          <a:bodyPr wrap="square" lIns="0" rIns="0" tIns="0" bIns="0">
+            <a:spAutoFit/>
+          </a:bodyPr>
+          <a:lstStyle/>
+          <a:p>
+            <a:r>
+              <a:rPr sz="1500" b="1">
+                <a:solidFill>
+                  <a:srgbClr val="1E2761"/>
+                </a:solidFill>
+                <a:latin typeface="Calibri"/>
+              </a:rPr>
+              <a:t>Particle background</a:t>
+            </a:r>
+          </a:p>
+        </p:txBody>
+      </p:sp>
+      <p:sp>
+        <p:nvSpPr>
+          <p:cNvPr id="10" name="TextBox 9"/>
+          <p:cNvSpPr txBox="1"/>
+          <p:nvPr/>
+        </p:nvSpPr>
+        <p:spPr>
+          <a:xfrm>
+            <a:off x="8275320" y="3675887"/>
+            <a:ext cx="3337560" cy="868680"/>
+          </a:xfrm>
+          <a:prstGeom prst="rect">
+            <a:avLst/>
+          </a:prstGeom>
+          <a:noFill/>
+        </p:spPr>
+        <p:txBody>
+          <a:bodyPr wrap="square" lIns="0" rIns="0" tIns="0" bIns="0">
+            <a:spAutoFit/>
+          </a:bodyPr>
+          <a:lstStyle/>
+          <a:p>
+            <a:r>
+              <a:rPr sz="1200" b="0">
+                <a:solidFill>
+                  <a:srgbClr val="5B6B8C"/>
+                </a:solidFill>
+                <a:latin typeface="Calibri"/>
+              </a:rPr>
+              <a:t>A canvas-based particle field behind every page, not just the landing hero.</a:t>
+            </a:r>
+          </a:p>
+        </p:txBody>
+      </p:sp>
+      <p:sp>
+        <p:nvSpPr>
+          <p:cNvPr id="11" name="Oval 10"/>
+          <p:cNvSpPr/>
+          <p:nvPr/>
+        </p:nvSpPr>
+        <p:spPr>
+          <a:xfrm>
+            <a:off x="8001000" y="4764023"/>
+            <a:ext cx="128016" cy="128016"/>
+          </a:xfrm>
+          <a:prstGeom prst="ellipse">
+            <a:avLst/>
+          </a:prstGeom>
+          <a:solidFill>
+            <a:srgbClr val="F5A623"/>
+          </a:solidFill>
+          <a:ln>
+            <a:noFill/>
+          </a:ln>
+          <a:effectLst/>
+        </p:spPr>
+        <p:style>
+          <a:lnRef idx="1">
+            <a:schemeClr val="accent1"/>
+          </a:lnRef>
+          <a:fillRef idx="3">
+            <a:schemeClr val="accent1"/>
+          </a:fillRef>
+          <a:effectRef idx="2">
+            <a:schemeClr val="accent1"/>
+          </a:effectRef>
+          <a:fontRef idx="minor">
+            <a:schemeClr val="lt1"/>
+          </a:fontRef>
+        </p:style>
+        <p:txBody>
+          <a:bodyPr rtlCol="0" anchor="ctr"/>
+          <a:lstStyle/>
+          <a:p>
+            <a:pPr algn="ctr"/>
+          </a:p>
+        </p:txBody>
+      </p:sp>
+      <p:sp>
+        <p:nvSpPr>
+          <p:cNvPr id="12" name="TextBox 11"/>
+          <p:cNvSpPr txBox="1"/>
+          <p:nvPr/>
+        </p:nvSpPr>
+        <p:spPr>
+          <a:xfrm>
+            <a:off x="8275320" y="4709159"/>
+            <a:ext cx="3337560" cy="320040"/>
+          </a:xfrm>
+          <a:prstGeom prst="rect">
+            <a:avLst/>
+          </a:prstGeom>
+          <a:noFill/>
+        </p:spPr>
+        <p:txBody>
+          <a:bodyPr wrap="square" lIns="0" rIns="0" tIns="0" bIns="0">
+            <a:spAutoFit/>
+          </a:bodyPr>
+          <a:lstStyle/>
+          <a:p>
+            <a:r>
+              <a:rPr sz="1500" b="1">
+                <a:solidFill>
+                  <a:srgbClr val="1E2761"/>
+                </a:solidFill>
+                <a:latin typeface="Calibri"/>
+              </a:rPr>
+              <a:t>Accessible role picker</a:t>
+            </a:r>
+          </a:p>
+        </p:txBody>
+      </p:sp>
+      <p:sp>
+        <p:nvSpPr>
+          <p:cNvPr id="13" name="TextBox 12"/>
+          <p:cNvSpPr txBox="1"/>
+          <p:nvPr/>
+        </p:nvSpPr>
+        <p:spPr>
+          <a:xfrm>
+            <a:off x="8275320" y="5093207"/>
+            <a:ext cx="3337560" cy="868680"/>
+          </a:xfrm>
+          <a:prstGeom prst="rect">
+            <a:avLst/>
+          </a:prstGeom>
+          <a:noFill/>
+        </p:spPr>
+        <p:txBody>
+          <a:bodyPr wrap="square" lIns="0" rIns="0" tIns="0" bIns="0">
+            <a:spAutoFit/>
+          </a:bodyPr>
+          <a:lstStyle/>
+          <a:p>
+            <a:r>
+              <a:rPr sz="1200" b="0">
+                <a:solidFill>
+                  <a:srgbClr val="5B6B8C"/>
+                </a:solidFill>
+                <a:latin typeface="Calibri"/>
+              </a:rPr>
+              <a:t>Full keyboard support -- arrows, Home/End, Enter, Escape, typeahead -- via aria-activedescendant, plus a no-JS fallback.</a:t>
+            </a:r>
+          </a:p>
+        </p:txBody>
+      </p:sp>
+      <p:sp>
+        <p:nvSpPr>
+          <p:cNvPr id="14" name="TextBox 13"/>
+          <p:cNvSpPr txBox="1"/>
+          <p:nvPr/>
+        </p:nvSpPr>
+        <p:spPr>
+          <a:xfrm>
+            <a:off x="11475720" y="6446520"/>
+            <a:ext cx="548640" cy="320040"/>
+          </a:xfrm>
+          <a:prstGeom prst="rect">
+            <a:avLst/>
+          </a:prstGeom>
+          <a:noFill/>
+        </p:spPr>
+        <p:txBody>
+          <a:bodyPr wrap="square" lIns="0" rIns="0" tIns="0" bIns="0">
+            <a:spAutoFit/>
+          </a:bodyPr>
+          <a:lstStyle/>
+          <a:p>
+            <a:pPr algn="r"/>
+            <a:r>
+              <a:rPr sz="1000" b="0">
+                <a:solidFill>
+                  <a:srgbClr val="5B6B8C"/>
+                </a:solidFill>
+                <a:latin typeface="Calibri"/>
+              </a:rPr>
+              <a:t>16</a:t>
+            </a:r>
           </a:p>
         </p:txBody>
       </p:sp>
@@ -5337,6 +7994,10 @@
             </a:outerShdw>
           </a:effectLst>
         </p:spPr>
+        <p:txBody>
+          <a:bodyPr/>
+          <a:p/>
+        </p:txBody>
       </p:sp>
       <p:sp>
         <p:nvSpPr>
@@ -5357,6 +8018,10 @@
           </a:solidFill>
           <a:ln/>
         </p:spPr>
+        <p:txBody>
+          <a:bodyPr/>
+          <a:p/>
+        </p:txBody>
       </p:sp>
       <p:sp>
         <p:nvSpPr>
@@ -5503,6 +8168,10 @@
             </a:outerShdw>
           </a:effectLst>
         </p:spPr>
+        <p:txBody>
+          <a:bodyPr/>
+          <a:p/>
+        </p:txBody>
       </p:sp>
       <p:sp>
         <p:nvSpPr>
@@ -5523,6 +8192,10 @@
           </a:solidFill>
           <a:ln/>
         </p:spPr>
+        <p:txBody>
+          <a:bodyPr/>
+          <a:p/>
+        </p:txBody>
       </p:sp>
       <p:sp>
         <p:nvSpPr>
@@ -5669,6 +8342,10 @@
             </a:outerShdw>
           </a:effectLst>
         </p:spPr>
+        <p:txBody>
+          <a:bodyPr/>
+          <a:p/>
+        </p:txBody>
       </p:sp>
       <p:sp>
         <p:nvSpPr>
@@ -5689,6 +8366,10 @@
           </a:solidFill>
           <a:ln/>
         </p:spPr>
+        <p:txBody>
+          <a:bodyPr/>
+          <a:p/>
+        </p:txBody>
       </p:sp>
       <p:sp>
         <p:nvSpPr>
@@ -5984,6 +8665,10 @@
             </a:outerShdw>
           </a:effectLst>
         </p:spPr>
+        <p:txBody>
+          <a:bodyPr/>
+          <a:p/>
+        </p:txBody>
       </p:sp>
       <p:sp>
         <p:nvSpPr>
@@ -6004,6 +8689,10 @@
           </a:solidFill>
           <a:ln/>
         </p:spPr>
+        <p:txBody>
+          <a:bodyPr/>
+          <a:p/>
+        </p:txBody>
       </p:sp>
       <p:sp>
         <p:nvSpPr>
@@ -6150,6 +8839,10 @@
             </a:outerShdw>
           </a:effectLst>
         </p:spPr>
+        <p:txBody>
+          <a:bodyPr/>
+          <a:p/>
+        </p:txBody>
       </p:sp>
       <p:sp>
         <p:nvSpPr>
@@ -6170,6 +8863,10 @@
           </a:solidFill>
           <a:ln/>
         </p:spPr>
+        <p:txBody>
+          <a:bodyPr/>
+          <a:p/>
+        </p:txBody>
       </p:sp>
       <p:sp>
         <p:nvSpPr>
@@ -6316,6 +9013,10 @@
             </a:outerShdw>
           </a:effectLst>
         </p:spPr>
+        <p:txBody>
+          <a:bodyPr/>
+          <a:p/>
+        </p:txBody>
       </p:sp>
       <p:sp>
         <p:nvSpPr>
@@ -6336,6 +9037,10 @@
           </a:solidFill>
           <a:ln/>
         </p:spPr>
+        <p:txBody>
+          <a:bodyPr/>
+          <a:p/>
+        </p:txBody>
       </p:sp>
       <p:sp>
         <p:nvSpPr>
@@ -6482,6 +9187,10 @@
             </a:outerShdw>
           </a:effectLst>
         </p:spPr>
+        <p:txBody>
+          <a:bodyPr/>
+          <a:p/>
+        </p:txBody>
       </p:sp>
       <p:sp>
         <p:nvSpPr>
@@ -6502,6 +9211,10 @@
           </a:solidFill>
           <a:ln/>
         </p:spPr>
+        <p:txBody>
+          <a:bodyPr/>
+          <a:p/>
+        </p:txBody>
       </p:sp>
       <p:sp>
         <p:nvSpPr>
@@ -6648,6 +9361,10 @@
             </a:outerShdw>
           </a:effectLst>
         </p:spPr>
+        <p:txBody>
+          <a:bodyPr/>
+          <a:p/>
+        </p:txBody>
       </p:sp>
       <p:sp>
         <p:nvSpPr>
@@ -6668,6 +9385,10 @@
           </a:solidFill>
           <a:ln/>
         </p:spPr>
+        <p:txBody>
+          <a:bodyPr/>
+          <a:p/>
+        </p:txBody>
       </p:sp>
       <p:sp>
         <p:nvSpPr>
@@ -6963,6 +9684,10 @@
             </a:outerShdw>
           </a:effectLst>
         </p:spPr>
+        <p:txBody>
+          <a:bodyPr/>
+          <a:p/>
+        </p:txBody>
       </p:sp>
       <p:sp>
         <p:nvSpPr>
@@ -7087,6 +9812,10 @@
             </a:outerShdw>
           </a:effectLst>
         </p:spPr>
+        <p:txBody>
+          <a:bodyPr/>
+          <a:p/>
+        </p:txBody>
       </p:sp>
       <p:sp>
         <p:nvSpPr>
@@ -7211,6 +9940,10 @@
             </a:outerShdw>
           </a:effectLst>
         </p:spPr>
+        <p:txBody>
+          <a:bodyPr/>
+          <a:p/>
+        </p:txBody>
       </p:sp>
       <p:sp>
         <p:nvSpPr>
@@ -7352,6 +10085,10 @@
             </a:outerShdw>
           </a:effectLst>
         </p:spPr>
+        <p:txBody>
+          <a:bodyPr/>
+          <a:p/>
+        </p:txBody>
       </p:sp>
       <p:sp>
         <p:nvSpPr>
@@ -7476,6 +10213,10 @@
             </a:outerShdw>
           </a:effectLst>
         </p:spPr>
+        <p:txBody>
+          <a:bodyPr/>
+          <a:p/>
+        </p:txBody>
       </p:sp>
       <p:sp>
         <p:nvSpPr>
@@ -7749,6 +10490,10 @@
             </a:outerShdw>
           </a:effectLst>
         </p:spPr>
+        <p:txBody>
+          <a:bodyPr/>
+          <a:p/>
+        </p:txBody>
       </p:sp>
       <p:sp>
         <p:nvSpPr>
@@ -7856,6 +10601,10 @@
             </a:outerShdw>
           </a:effectLst>
         </p:spPr>
+        <p:txBody>
+          <a:bodyPr/>
+          <a:p/>
+        </p:txBody>
       </p:sp>
       <p:sp>
         <p:nvSpPr>
@@ -7963,6 +10712,10 @@
             </a:outerShdw>
           </a:effectLst>
         </p:spPr>
+        <p:txBody>
+          <a:bodyPr/>
+          <a:p/>
+        </p:txBody>
       </p:sp>
       <p:sp>
         <p:nvSpPr>
@@ -8070,6 +10823,10 @@
             </a:outerShdw>
           </a:effectLst>
         </p:spPr>
+        <p:txBody>
+          <a:bodyPr/>
+          <a:p/>
+        </p:txBody>
       </p:sp>
       <p:sp>
         <p:nvSpPr>
@@ -8177,6 +10934,10 @@
             </a:outerShdw>
           </a:effectLst>
         </p:spPr>
+        <p:txBody>
+          <a:bodyPr/>
+          <a:p/>
+        </p:txBody>
       </p:sp>
       <p:sp>
         <p:nvSpPr>
@@ -8284,6 +11045,10 @@
             </a:outerShdw>
           </a:effectLst>
         </p:spPr>
+        <p:txBody>
+          <a:bodyPr/>
+          <a:p/>
+        </p:txBody>
       </p:sp>
       <p:sp>
         <p:nvSpPr>
@@ -8357,7 +11122,7 @@
                 <a:ea typeface="Calibri" pitchFamily="34" charset="-122"/>
                 <a:cs typeface="Calibri" pitchFamily="34" charset="-120"/>
               </a:rPr>
-              <a:t>pytest  --  74 tests</a:t>
+              <a:t>pytest  --  119 tests</a:t>
             </a:r>
             <a:endParaRPr lang="en-US" sz="1150" dirty="0"/>
           </a:p>
@@ -8391,6 +11156,10 @@
             </a:outerShdw>
           </a:effectLst>
         </p:spPr>
+        <p:txBody>
+          <a:bodyPr/>
+          <a:p/>
+        </p:txBody>
       </p:sp>
       <p:sp>
         <p:nvSpPr>
@@ -8498,6 +11267,10 @@
             </a:outerShdw>
           </a:effectLst>
         </p:spPr>
+        <p:txBody>
+          <a:bodyPr/>
+          <a:p/>
+        </p:txBody>
       </p:sp>
       <p:sp>
         <p:nvSpPr>
@@ -8761,6 +11534,10 @@
           </a:solidFill>
           <a:ln/>
         </p:spPr>
+        <p:txBody>
+          <a:bodyPr/>
+          <a:p/>
+        </p:txBody>
       </p:sp>
       <p:sp>
         <p:nvSpPr>
@@ -8859,6 +11636,10 @@
           </a:solidFill>
           <a:ln/>
         </p:spPr>
+        <p:txBody>
+          <a:bodyPr/>
+          <a:p/>
+        </p:txBody>
       </p:sp>
       <p:sp>
         <p:nvSpPr>
@@ -8957,6 +11738,10 @@
           </a:solidFill>
           <a:ln/>
         </p:spPr>
+        <p:txBody>
+          <a:bodyPr/>
+          <a:p/>
+        </p:txBody>
       </p:sp>
       <p:sp>
         <p:nvSpPr>
@@ -9055,6 +11840,10 @@
           </a:solidFill>
           <a:ln/>
         </p:spPr>
+        <p:txBody>
+          <a:bodyPr/>
+          <a:p/>
+        </p:txBody>
       </p:sp>
       <p:sp>
         <p:nvSpPr>
@@ -9311,6 +12100,10 @@
             </a:outerShdw>
           </a:effectLst>
         </p:spPr>
+        <p:txBody>
+          <a:bodyPr/>
+          <a:p/>
+        </p:txBody>
       </p:sp>
       <p:sp>
         <p:nvSpPr>
@@ -9652,6 +12445,10 @@
             </a:outerShdw>
           </a:effectLst>
         </p:spPr>
+        <p:txBody>
+          <a:bodyPr/>
+          <a:p/>
+        </p:txBody>
       </p:sp>
       <p:sp>
         <p:nvSpPr>
@@ -9986,6 +12783,10 @@
             </a:outerShdw>
           </a:effectLst>
         </p:spPr>
+        <p:txBody>
+          <a:bodyPr/>
+          <a:p/>
+        </p:txBody>
       </p:sp>
       <p:sp>
         <p:nvSpPr>
@@ -10132,6 +12933,10 @@
             </a:outerShdw>
           </a:effectLst>
         </p:spPr>
+        <p:txBody>
+          <a:bodyPr/>
+          <a:p/>
+        </p:txBody>
       </p:sp>
       <p:sp>
         <p:nvSpPr>
@@ -10278,6 +13083,10 @@
             </a:outerShdw>
           </a:effectLst>
         </p:spPr>
+        <p:txBody>
+          <a:bodyPr/>
+          <a:p/>
+        </p:txBody>
       </p:sp>
       <p:sp>
         <p:nvSpPr>
@@ -10424,6 +13233,10 @@
             </a:outerShdw>
           </a:effectLst>
         </p:spPr>
+        <p:txBody>
+          <a:bodyPr/>
+          <a:p/>
+        </p:txBody>
       </p:sp>
       <p:sp>
         <p:nvSpPr>
@@ -10719,6 +13532,10 @@
             </a:outerShdw>
           </a:effectLst>
         </p:spPr>
+        <p:txBody>
+          <a:bodyPr/>
+          <a:p/>
+        </p:txBody>
       </p:sp>
       <p:sp>
         <p:nvSpPr>
@@ -10904,6 +13721,10 @@
             </a:outerShdw>
           </a:effectLst>
         </p:spPr>
+        <p:txBody>
+          <a:bodyPr/>
+          <a:p/>
+        </p:txBody>
       </p:sp>
       <p:sp>
         <p:nvSpPr>
@@ -11089,6 +13910,10 @@
             </a:outerShdw>
           </a:effectLst>
         </p:spPr>
+        <p:txBody>
+          <a:bodyPr/>
+          <a:p/>
+        </p:txBody>
       </p:sp>
       <p:sp>
         <p:nvSpPr>
@@ -11274,6 +14099,10 @@
             </a:outerShdw>
           </a:effectLst>
         </p:spPr>
+        <p:txBody>
+          <a:bodyPr/>
+          <a:p/>
+        </p:txBody>
       </p:sp>
       <p:sp>
         <p:nvSpPr>
@@ -11459,6 +14288,10 @@
             </a:outerShdw>
           </a:effectLst>
         </p:spPr>
+        <p:txBody>
+          <a:bodyPr/>
+          <a:p/>
+        </p:txBody>
       </p:sp>
       <p:sp>
         <p:nvSpPr>
